--- a/doc/slides/architecture.pptx
+++ b/doc/slides/architecture.pptx
@@ -4962,7 +4962,7 @@
                 <a:cs typeface="Meiryo"/>
                 <a:ea typeface="Meiryo"/>
               </a:rPr>
-              <a:t>テストでは偽の実装を渡すだけで済む。データベースも外部APIも起動しないため、828件のテストが約35秒で終わる</a:t>
+              <a:t>テストでは偽の実装を渡すだけで済む。データベースも外部APIも起動しないため、842件のテストが約35秒で終わる</a:t>
             </a:r>
           </a:p>
         </p:txBody>
@@ -14416,7 +14416,7 @@
                 <a:cs typeface="Meiryo"/>
                 <a:ea typeface="Meiryo"/>
               </a:rPr>
-              <a:t>   テスト62ファイル / 828件。分布は意図的に偏らせている</a:t>
+              <a:t>   テスト63ファイル / 842件。分布は意図的に偏らせている</a:t>
             </a:r>
           </a:p>
         </p:txBody>
@@ -21885,7 +21885,7 @@
                 <a:cs typeface="Meiryo"/>
                 <a:ea typeface="Meiryo"/>
               </a:rPr>
-              <a:t>毎pushで静的検査・型検査・828件のテスト・本番ビルド・混入検査まで自動実行</a:t>
+              <a:t>毎pushで静的検査・型検査・842件のテスト・本番ビルド・混入検査まで自動実行</a:t>
             </a:r>
           </a:p>
         </p:txBody>
@@ -23717,7 +23717,7 @@
                 <a:cs typeface="Meiryo"/>
                 <a:ea typeface="Meiryo"/>
               </a:rPr>
-              <a:t>TypeScript 246ファイル / 約32,100行</a:t>
+              <a:t>TypeScript 248ファイル / 約32,900行</a:t>
             </a:r>
             <a:r>
               <a:rPr sz="1050" b="0">
@@ -23754,7 +23754,7 @@
                 <a:cs typeface="Meiryo"/>
                 <a:ea typeface="Meiryo"/>
               </a:rPr>
-              <a:t>テスト 62ファイル / 828件</a:t>
+              <a:t>テスト 63ファイル / 842件</a:t>
             </a:r>
             <a:r>
               <a:rPr sz="1050" b="0">
@@ -23802,7 +23802,7 @@
                 <a:cs typeface="Meiryo"/>
                 <a:ea typeface="Meiryo"/>
               </a:rPr>
-              <a:t> / マイグレーション4本</a:t>
+              <a:t> / マイグレーション5本</a:t>
             </a:r>
           </a:p>
         </p:txBody>

--- a/doc/slides/architecture.pptx
+++ b/doc/slides/architecture.pptx
@@ -3501,7 +3501,7 @@
                 <a:cs typeface="Meiryo"/>
                 <a:ea typeface="Meiryo"/>
               </a:rPr>
-              <a:t>窓口(ポート)の一覧 — 29本</a:t>
+              <a:t>窓口(ポート)の一覧 — 30本</a:t>
             </a:r>
             <a:r>
               <a:rPr sz="1250" b="0" i="0">
@@ -3740,7 +3740,7 @@
                 <a:cs typeface="Meiryo"/>
                 <a:ea typeface="Meiryo"/>
               </a:rPr>
-              <a:t>データの読み書き(15本)</a:t>
+              <a:t>データの読み書き(16本)</a:t>
             </a:r>
           </a:p>
         </p:txBody>
@@ -3769,7 +3769,7 @@
           <a:p>
             <a:pPr marL="182880" indent="-182880">
               <a:lnSpc>
-                <a:spcPct val="125000"/>
+                <a:spcPct val="120000"/>
               </a:lnSpc>
               <a:spcBef>
                 <a:spcPts val="0"/>
@@ -3795,10 +3795,10 @@
           <a:p>
             <a:pPr marL="182880" indent="-182880">
               <a:lnSpc>
-                <a:spcPct val="125000"/>
+                <a:spcPct val="120000"/>
               </a:lnSpc>
               <a:spcBef>
-                <a:spcPts val="550"/>
+                <a:spcPts val="350"/>
               </a:spcBef>
               <a:buClr>
                 <a:srgbClr val="0369A1"/>
@@ -3821,10 +3821,10 @@
           <a:p>
             <a:pPr marL="182880" indent="-182880">
               <a:lnSpc>
-                <a:spcPct val="125000"/>
+                <a:spcPct val="120000"/>
               </a:lnSpc>
               <a:spcBef>
-                <a:spcPts val="550"/>
+                <a:spcPts val="350"/>
               </a:spcBef>
               <a:buClr>
                 <a:srgbClr val="0369A1"/>
@@ -3847,10 +3847,10 @@
           <a:p>
             <a:pPr marL="182880" indent="-182880">
               <a:lnSpc>
-                <a:spcPct val="125000"/>
+                <a:spcPct val="120000"/>
               </a:lnSpc>
               <a:spcBef>
-                <a:spcPts val="550"/>
+                <a:spcPts val="350"/>
               </a:spcBef>
               <a:buClr>
                 <a:srgbClr val="0369A1"/>
@@ -3873,10 +3873,10 @@
           <a:p>
             <a:pPr marL="182880" indent="-182880">
               <a:lnSpc>
-                <a:spcPct val="125000"/>
+                <a:spcPct val="120000"/>
               </a:lnSpc>
               <a:spcBef>
-                <a:spcPts val="550"/>
+                <a:spcPts val="350"/>
               </a:spcBef>
               <a:buClr>
                 <a:srgbClr val="0369A1"/>
@@ -3899,10 +3899,10 @@
           <a:p>
             <a:pPr marL="182880" indent="-182880">
               <a:lnSpc>
-                <a:spcPct val="125000"/>
+                <a:spcPct val="120000"/>
               </a:lnSpc>
               <a:spcBef>
-                <a:spcPts val="550"/>
+                <a:spcPts val="350"/>
               </a:spcBef>
               <a:buClr>
                 <a:srgbClr val="0369A1"/>
@@ -3925,10 +3925,10 @@
           <a:p>
             <a:pPr marL="182880" indent="-182880">
               <a:lnSpc>
-                <a:spcPct val="125000"/>
+                <a:spcPct val="120000"/>
               </a:lnSpc>
               <a:spcBef>
-                <a:spcPts val="550"/>
+                <a:spcPts val="350"/>
               </a:spcBef>
               <a:buClr>
                 <a:srgbClr val="0369A1"/>
@@ -3951,10 +3951,10 @@
           <a:p>
             <a:pPr marL="182880" indent="-182880">
               <a:lnSpc>
-                <a:spcPct val="125000"/>
+                <a:spcPct val="120000"/>
               </a:lnSpc>
               <a:spcBef>
-                <a:spcPts val="550"/>
+                <a:spcPts val="350"/>
               </a:spcBef>
               <a:buClr>
                 <a:srgbClr val="0369A1"/>
@@ -3977,10 +3977,10 @@
           <a:p>
             <a:pPr marL="182880" indent="-182880">
               <a:lnSpc>
-                <a:spcPct val="125000"/>
+                <a:spcPct val="120000"/>
               </a:lnSpc>
               <a:spcBef>
-                <a:spcPts val="550"/>
+                <a:spcPts val="350"/>
               </a:spcBef>
               <a:buClr>
                 <a:srgbClr val="0369A1"/>
@@ -4003,10 +4003,10 @@
           <a:p>
             <a:pPr marL="182880" indent="-182880">
               <a:lnSpc>
-                <a:spcPct val="125000"/>
+                <a:spcPct val="120000"/>
               </a:lnSpc>
               <a:spcBef>
-                <a:spcPts val="550"/>
+                <a:spcPts val="350"/>
               </a:spcBef>
               <a:buClr>
                 <a:srgbClr val="0369A1"/>
@@ -4029,10 +4029,10 @@
           <a:p>
             <a:pPr marL="182880" indent="-182880">
               <a:lnSpc>
-                <a:spcPct val="125000"/>
+                <a:spcPct val="120000"/>
               </a:lnSpc>
               <a:spcBef>
-                <a:spcPts val="550"/>
+                <a:spcPts val="350"/>
               </a:spcBef>
               <a:buClr>
                 <a:srgbClr val="0369A1"/>
@@ -4055,10 +4055,10 @@
           <a:p>
             <a:pPr marL="182880" indent="-182880">
               <a:lnSpc>
-                <a:spcPct val="125000"/>
+                <a:spcPct val="120000"/>
               </a:lnSpc>
               <a:spcBef>
-                <a:spcPts val="550"/>
+                <a:spcPts val="350"/>
               </a:spcBef>
               <a:buClr>
                 <a:srgbClr val="0369A1"/>
@@ -4081,10 +4081,10 @@
           <a:p>
             <a:pPr marL="182880" indent="-182880">
               <a:lnSpc>
-                <a:spcPct val="125000"/>
+                <a:spcPct val="120000"/>
               </a:lnSpc>
               <a:spcBef>
-                <a:spcPts val="550"/>
+                <a:spcPts val="350"/>
               </a:spcBef>
               <a:buClr>
                 <a:srgbClr val="0369A1"/>
@@ -4107,10 +4107,10 @@
           <a:p>
             <a:pPr marL="182880" indent="-182880">
               <a:lnSpc>
-                <a:spcPct val="125000"/>
+                <a:spcPct val="120000"/>
               </a:lnSpc>
               <a:spcBef>
-                <a:spcPts val="550"/>
+                <a:spcPts val="350"/>
               </a:spcBef>
               <a:buClr>
                 <a:srgbClr val="0369A1"/>
@@ -4133,10 +4133,36 @@
           <a:p>
             <a:pPr marL="182880" indent="-182880">
               <a:lnSpc>
-                <a:spcPct val="125000"/>
+                <a:spcPct val="120000"/>
               </a:lnSpc>
               <a:spcBef>
-                <a:spcPts val="550"/>
+                <a:spcPts val="350"/>
+              </a:spcBef>
+              <a:buClr>
+                <a:srgbClr val="0369A1"/>
+              </a:buClr>
+              <a:buFont typeface="Meiryo"/>
+              <a:buChar char="▪"/>
+            </a:pPr>
+            <a:r>
+              <a:rPr sz="1050" b="0">
+                <a:solidFill>
+                  <a:srgbClr val="14223A"/>
+                </a:solidFill>
+                <a:latin typeface="Meiryo"/>
+                <a:cs typeface="Meiryo"/>
+                <a:ea typeface="Meiryo"/>
+              </a:rPr>
+              <a:t>PromptTemplate AIプロンプト文面</a:t>
+            </a:r>
+          </a:p>
+          <a:p>
+            <a:pPr marL="182880" indent="-182880">
+              <a:lnSpc>
+                <a:spcPct val="120000"/>
+              </a:lnSpc>
+              <a:spcBef>
+                <a:spcPts val="350"/>
               </a:spcBef>
               <a:buClr>
                 <a:srgbClr val="0369A1"/>
@@ -4290,7 +4316,7 @@
           <a:p>
             <a:pPr marL="182880" indent="-182880">
               <a:lnSpc>
-                <a:spcPct val="125000"/>
+                <a:spcPct val="120000"/>
               </a:lnSpc>
               <a:spcBef>
                 <a:spcPts val="0"/>
@@ -4316,10 +4342,10 @@
           <a:p>
             <a:pPr marL="182880" indent="-182880">
               <a:lnSpc>
-                <a:spcPct val="125000"/>
+                <a:spcPct val="120000"/>
               </a:lnSpc>
               <a:spcBef>
-                <a:spcPts val="550"/>
+                <a:spcPts val="350"/>
               </a:spcBef>
               <a:buClr>
                 <a:srgbClr val="6D28D9"/>
@@ -4342,10 +4368,10 @@
           <a:p>
             <a:pPr marL="182880" indent="-182880">
               <a:lnSpc>
-                <a:spcPct val="125000"/>
+                <a:spcPct val="120000"/>
               </a:lnSpc>
               <a:spcBef>
-                <a:spcPts val="550"/>
+                <a:spcPts val="350"/>
               </a:spcBef>
               <a:buClr>
                 <a:srgbClr val="6D28D9"/>
@@ -4368,10 +4394,10 @@
           <a:p>
             <a:pPr marL="182880" indent="-182880">
               <a:lnSpc>
-                <a:spcPct val="125000"/>
+                <a:spcPct val="120000"/>
               </a:lnSpc>
               <a:spcBef>
-                <a:spcPts val="550"/>
+                <a:spcPts val="350"/>
               </a:spcBef>
               <a:buClr>
                 <a:srgbClr val="6D28D9"/>
@@ -4394,10 +4420,10 @@
           <a:p>
             <a:pPr marL="182880" indent="-182880">
               <a:lnSpc>
-                <a:spcPct val="125000"/>
+                <a:spcPct val="120000"/>
               </a:lnSpc>
               <a:spcBef>
-                <a:spcPts val="550"/>
+                <a:spcPts val="350"/>
               </a:spcBef>
               <a:buClr>
                 <a:srgbClr val="6D28D9"/>
@@ -4420,10 +4446,10 @@
           <a:p>
             <a:pPr marL="182880" indent="-182880">
               <a:lnSpc>
-                <a:spcPct val="125000"/>
+                <a:spcPct val="120000"/>
               </a:lnSpc>
               <a:spcBef>
-                <a:spcPts val="550"/>
+                <a:spcPts val="350"/>
               </a:spcBef>
               <a:buClr>
                 <a:srgbClr val="6D28D9"/>
@@ -4446,10 +4472,10 @@
           <a:p>
             <a:pPr marL="182880" indent="-182880">
               <a:lnSpc>
-                <a:spcPct val="125000"/>
+                <a:spcPct val="120000"/>
               </a:lnSpc>
               <a:spcBef>
-                <a:spcPts val="550"/>
+                <a:spcPts val="350"/>
               </a:spcBef>
               <a:buClr>
                 <a:srgbClr val="6D28D9"/>
@@ -4472,10 +4498,10 @@
           <a:p>
             <a:pPr marL="182880" indent="-182880">
               <a:lnSpc>
-                <a:spcPct val="125000"/>
+                <a:spcPct val="120000"/>
               </a:lnSpc>
               <a:spcBef>
-                <a:spcPts val="550"/>
+                <a:spcPts val="350"/>
               </a:spcBef>
               <a:buClr>
                 <a:srgbClr val="6D28D9"/>
@@ -4498,10 +4524,10 @@
           <a:p>
             <a:pPr marL="182880" indent="-182880">
               <a:lnSpc>
-                <a:spcPct val="125000"/>
+                <a:spcPct val="120000"/>
               </a:lnSpc>
               <a:spcBef>
-                <a:spcPts val="550"/>
+                <a:spcPts val="350"/>
               </a:spcBef>
               <a:buClr>
                 <a:srgbClr val="6D28D9"/>
@@ -4655,7 +4681,7 @@
           <a:p>
             <a:pPr marL="182880" indent="-182880">
               <a:lnSpc>
-                <a:spcPct val="125000"/>
+                <a:spcPct val="120000"/>
               </a:lnSpc>
               <a:spcBef>
                 <a:spcPts val="0"/>
@@ -4681,10 +4707,10 @@
           <a:p>
             <a:pPr marL="182880" indent="-182880">
               <a:lnSpc>
-                <a:spcPct val="125000"/>
+                <a:spcPct val="120000"/>
               </a:lnSpc>
               <a:spcBef>
-                <a:spcPts val="550"/>
+                <a:spcPts val="350"/>
               </a:spcBef>
               <a:buClr>
                 <a:srgbClr val="047857"/>
@@ -4707,10 +4733,10 @@
           <a:p>
             <a:pPr marL="182880" indent="-182880">
               <a:lnSpc>
-                <a:spcPct val="125000"/>
+                <a:spcPct val="120000"/>
               </a:lnSpc>
               <a:spcBef>
-                <a:spcPts val="550"/>
+                <a:spcPts val="350"/>
               </a:spcBef>
               <a:buClr>
                 <a:srgbClr val="047857"/>
@@ -4733,10 +4759,10 @@
           <a:p>
             <a:pPr marL="182880" indent="-182880">
               <a:lnSpc>
-                <a:spcPct val="125000"/>
+                <a:spcPct val="120000"/>
               </a:lnSpc>
               <a:spcBef>
-                <a:spcPts val="550"/>
+                <a:spcPts val="350"/>
               </a:spcBef>
               <a:buClr>
                 <a:srgbClr val="047857"/>
@@ -4759,10 +4785,10 @@
           <a:p>
             <a:pPr marL="182880" indent="-182880">
               <a:lnSpc>
-                <a:spcPct val="125000"/>
+                <a:spcPct val="120000"/>
               </a:lnSpc>
               <a:spcBef>
-                <a:spcPts val="550"/>
+                <a:spcPts val="350"/>
               </a:spcBef>
               <a:buClr>
                 <a:srgbClr val="047857"/>
@@ -12276,7 +12302,7 @@
                 <a:cs typeface="Meiryo"/>
                 <a:ea typeface="Meiryo"/>
               </a:rPr>
-              <a:t>(業務データは平文。詳細は doc/slides/db-review.pptx P13)</a:t>
+              <a:t>(業務データは平文。詳細は doc/slides/db-review.pptx P15)</a:t>
             </a:r>
           </a:p>
           <a:p>
@@ -13470,7 +13496,7 @@
                 <a:cs typeface="Meiryo"/>
                 <a:ea typeface="Meiryo"/>
               </a:rPr>
-              <a:t>同じマイグレーション(34テーブル)・同じ行レベルセキュリティ・同じ業務ロジック・同じAPIルート</a:t>
+              <a:t>同じマイグレーション(44テーブル)・同じ行レベルセキュリティ・同じ業務ロジック・同じAPIルート</a:t>
             </a:r>
           </a:p>
           <a:p>
@@ -16530,7 +16556,7 @@
         </p:nvGraphicFramePr>
         <p:xfrm>
           <a:off x="457200" y="1170432"/>
-          <a:ext cx="11277293" cy="4325112"/>
+          <a:ext cx="11277293" cy="4206240"/>
         </p:xfrm>
         <a:graphic>
           <a:graphicData uri="http://schemas.openxmlformats.org/drawingml/2006/table">
@@ -16543,7 +16569,7 @@
                 <a:gridCol w="1443493"/>
                 <a:gridCol w="5864193"/>
               </a:tblGrid>
-              <a:tr h="301752">
+              <a:tr h="283464">
                 <a:tc>
                   <a:txBody>
                     <a:bodyPr wrap="square"/>
@@ -16635,7 +16661,7 @@
                   </a:tcPr>
                 </a:tc>
               </a:tr>
-              <a:tr h="402336">
+              <a:tr h="356616">
                 <a:tc>
                   <a:txBody>
                     <a:bodyPr wrap="square"/>
@@ -16716,7 +16742,7 @@
                           <a:cs typeface="Meiryo"/>
                           <a:ea typeface="Meiryo"/>
                         </a:rPr>
-                        <a:t>34テーブル、複合外部キー、FORCE。静的検査と実DB検証をCIで実行</a:t>
+                        <a:t>44テーブル、複合外部キー、FORCE。静的検査と実DB検証をCIで実行</a:t>
                       </a:r>
                     </a:p>
                   </a:txBody>
@@ -16727,7 +16753,7 @@
                   </a:tcPr>
                 </a:tc>
               </a:tr>
-              <a:tr h="402336">
+              <a:tr h="356616">
                 <a:tc>
                   <a:txBody>
                     <a:bodyPr wrap="square"/>
@@ -16819,7 +16845,7 @@
                   </a:tcPr>
                 </a:tc>
               </a:tr>
-              <a:tr h="402336">
+              <a:tr h="356616">
                 <a:tc>
                   <a:txBody>
                     <a:bodyPr wrap="square"/>
@@ -16911,7 +16937,7 @@
                   </a:tcPr>
                 </a:tc>
               </a:tr>
-              <a:tr h="402336">
+              <a:tr h="356616">
                 <a:tc>
                   <a:txBody>
                     <a:bodyPr wrap="square"/>
@@ -17003,7 +17029,7 @@
                   </a:tcPr>
                 </a:tc>
               </a:tr>
-              <a:tr h="402336">
+              <a:tr h="356616">
                 <a:tc>
                   <a:txBody>
                     <a:bodyPr wrap="square"/>
@@ -17095,7 +17121,7 @@
                   </a:tcPr>
                 </a:tc>
               </a:tr>
-              <a:tr h="402336">
+              <a:tr h="356616">
                 <a:tc>
                   <a:txBody>
                     <a:bodyPr wrap="square"/>
@@ -17187,7 +17213,7 @@
                   </a:tcPr>
                 </a:tc>
               </a:tr>
-              <a:tr h="402336">
+              <a:tr h="356616">
                 <a:tc>
                   <a:txBody>
                     <a:bodyPr wrap="square"/>
@@ -17279,7 +17305,7 @@
                   </a:tcPr>
                 </a:tc>
               </a:tr>
-              <a:tr h="402336">
+              <a:tr h="356616">
                 <a:tc>
                   <a:txBody>
                     <a:bodyPr wrap="square"/>
@@ -17300,13 +17326,105 @@
                           <a:cs typeface="Meiryo"/>
                           <a:ea typeface="Meiryo"/>
                         </a:rPr>
-                        <a:t>予約・請求・カルテ</a:t>
+                        <a:t>AIプロンプトの文面を管理者が編集</a:t>
                       </a:r>
                     </a:p>
                   </a:txBody>
                   <a:tcPr marL="64008" marR="64008" marT="27432" marB="27432" anchor="ctr">
                     <a:solidFill>
                       <a:srgbClr val="F8FAFC"/>
+                    </a:solidFill>
+                  </a:tcPr>
+                </a:tc>
+                <a:tc>
+                  <a:txBody>
+                    <a:bodyPr wrap="square"/>
+                    <a:lstStyle/>
+                    <a:p>
+                      <a:pPr algn="ctr">
+                        <a:lnSpc>
+                          <a:spcPct val="115000"/>
+                        </a:lnSpc>
+                        <a:buNone/>
+                      </a:pPr>
+                      <a:r>
+                        <a:rPr sz="1050" b="0">
+                          <a:solidFill>
+                            <a:srgbClr val="047857"/>
+                          </a:solidFill>
+                          <a:latin typeface="Meiryo"/>
+                          <a:cs typeface="Meiryo"/>
+                          <a:ea typeface="Meiryo"/>
+                        </a:rPr>
+                        <a:t>実装済み</a:t>
+                      </a:r>
+                    </a:p>
+                  </a:txBody>
+                  <a:tcPr marL="64008" marR="64008" marT="27432" marB="27432" anchor="ctr">
+                    <a:solidFill>
+                      <a:srgbClr val="F8FAFC"/>
+                    </a:solidFill>
+                  </a:tcPr>
+                </a:tc>
+                <a:tc>
+                  <a:txBody>
+                    <a:bodyPr wrap="square"/>
+                    <a:lstStyle/>
+                    <a:p>
+                      <a:pPr algn="l">
+                        <a:lnSpc>
+                          <a:spcPct val="115000"/>
+                        </a:lnSpc>
+                        <a:buNone/>
+                      </a:pPr>
+                      <a:r>
+                        <a:rPr sz="1050" b="0">
+                          <a:solidFill>
+                            <a:srgbClr val="14223A"/>
+                          </a:solidFill>
+                          <a:latin typeface="Meiryo"/>
+                          <a:cs typeface="Meiryo"/>
+                          <a:ea typeface="Meiryo"/>
+                        </a:rPr>
+                        <a:t>文面はDBで版管理(上書きしない)。管理画面から編集・履歴・既定に戻すまで動く</a:t>
+                      </a:r>
+                    </a:p>
+                  </a:txBody>
+                  <a:tcPr marL="64008" marR="64008" marT="27432" marB="27432" anchor="ctr">
+                    <a:solidFill>
+                      <a:srgbClr val="F8FAFC"/>
+                    </a:solidFill>
+                  </a:tcPr>
+                </a:tc>
+              </a:tr>
+              <a:tr h="356616">
+                <a:tc>
+                  <a:txBody>
+                    <a:bodyPr wrap="square"/>
+                    <a:lstStyle/>
+                    <a:p>
+                      <a:pPr algn="l">
+                        <a:lnSpc>
+                          <a:spcPct val="115000"/>
+                        </a:lnSpc>
+                        <a:buNone/>
+                      </a:pPr>
+                      <a:r>
+                        <a:rPr sz="1050" b="1">
+                          <a:solidFill>
+                            <a:srgbClr val="14223A"/>
+                          </a:solidFill>
+                          <a:latin typeface="Meiryo"/>
+                          <a:cs typeface="Meiryo"/>
+                          <a:ea typeface="Meiryo"/>
+                        </a:rPr>
+                        <a:t>予約・請求・カルテ・日報AIの3軸</a:t>
+                      </a:r>
+                    </a:p>
+                  </a:txBody>
+                  <a:tcPr marL="64008" marR="64008" marT="27432" marB="27432" anchor="ctr">
+                    <a:solidFill>
+                      <a:srgbClr val="FFFFFF"/>
                     </a:solidFill>
                   </a:tcPr>
                 </a:tc>
@@ -17336,7 +17454,7 @@
                   </a:txBody>
                   <a:tcPr marL="64008" marR="64008" marT="27432" marB="27432" anchor="ctr">
                     <a:solidFill>
-                      <a:srgbClr val="F8FAFC"/>
+                      <a:srgbClr val="FFFFFF"/>
                     </a:solidFill>
                   </a:tcPr>
                 </a:tc>
@@ -17366,12 +17484,12 @@
                   </a:txBody>
                   <a:tcPr marL="64008" marR="64008" marT="27432" marB="27432" anchor="ctr">
                     <a:solidFill>
-                      <a:srgbClr val="F8FAFC"/>
+                      <a:srgbClr val="FFFFFF"/>
                     </a:solidFill>
                   </a:tcPr>
                 </a:tc>
               </a:tr>
-              <a:tr h="402336">
+              <a:tr h="356616">
                 <a:tc>
                   <a:txBody>
                     <a:bodyPr wrap="square"/>
@@ -17398,7 +17516,7 @@
                   </a:txBody>
                   <a:tcPr marL="64008" marR="64008" marT="27432" marB="27432" anchor="ctr">
                     <a:solidFill>
-                      <a:srgbClr val="FFFFFF"/>
+                      <a:srgbClr val="F8FAFC"/>
                     </a:solidFill>
                   </a:tcPr>
                 </a:tc>
@@ -17428,7 +17546,7 @@
                   </a:txBody>
                   <a:tcPr marL="64008" marR="64008" marT="27432" marB="27432" anchor="ctr">
                     <a:solidFill>
-                      <a:srgbClr val="FFFFFF"/>
+                      <a:srgbClr val="F8FAFC"/>
                     </a:solidFill>
                   </a:tcPr>
                 </a:tc>
@@ -17458,12 +17576,12 @@
                   </a:txBody>
                   <a:tcPr marL="64008" marR="64008" marT="27432" marB="27432" anchor="ctr">
                     <a:solidFill>
-                      <a:srgbClr val="FFFFFF"/>
+                      <a:srgbClr val="F8FAFC"/>
                     </a:solidFill>
                   </a:tcPr>
                 </a:tc>
               </a:tr>
-              <a:tr h="402336">
+              <a:tr h="356616">
                 <a:tc>
                   <a:txBody>
                     <a:bodyPr wrap="square"/>
@@ -17490,7 +17608,7 @@
                   </a:txBody>
                   <a:tcPr marL="64008" marR="64008" marT="27432" marB="27432" anchor="ctr">
                     <a:solidFill>
-                      <a:srgbClr val="F8FAFC"/>
+                      <a:srgbClr val="FFFFFF"/>
                     </a:solidFill>
                   </a:tcPr>
                 </a:tc>
@@ -17520,7 +17638,7 @@
                   </a:txBody>
                   <a:tcPr marL="64008" marR="64008" marT="27432" marB="27432" anchor="ctr">
                     <a:solidFill>
-                      <a:srgbClr val="F8FAFC"/>
+                      <a:srgbClr val="FFFFFF"/>
                     </a:solidFill>
                   </a:tcPr>
                 </a:tc>
@@ -17550,7 +17668,7 @@
                   </a:txBody>
                   <a:tcPr marL="64008" marR="64008" marT="27432" marB="27432" anchor="ctr">
                     <a:solidFill>
-                      <a:srgbClr val="F8FAFC"/>
+                      <a:srgbClr val="FFFFFF"/>
                     </a:solidFill>
                   </a:tcPr>
                 </a:tc>
@@ -20569,7 +20687,7 @@
                 <a:cs typeface="Meiryo"/>
                 <a:ea typeface="Meiryo"/>
               </a:rPr>
-              <a:t>先行整備した5ドメインの進め方</a:t>
+              <a:t>先行整備した6ドメインの進め方</a:t>
             </a:r>
           </a:p>
         </p:txBody>
@@ -20611,7 +20729,7 @@
                 <a:cs typeface="Meiryo"/>
                 <a:ea typeface="Meiryo"/>
               </a:rPr>
-              <a:t>予約・請求・カルテ・訪問最適化・移動手当は、表と制約だけ先に用意してある。予約の二重取りだけはDBで止められておらず、アプリ側の責任になっている。</a:t>
+              <a:t>予約・請求・カルテ・訪問最適化・移動手当・日報AIの3軸は、表と制約だけ先に用意してある。予約の二重取りだけはDBで止められておらず、アプリ側の責任になっている。</a:t>
             </a:r>
           </a:p>
         </p:txBody>
@@ -21859,7 +21977,7 @@
                 <a:cs typeface="Meiryo"/>
                 <a:ea typeface="Meiryo"/>
               </a:rPr>
-              <a:t>34テーブルすべてで同じスキーマ規約。新しい表を足す手順が決まっている</a:t>
+              <a:t>44テーブルすべてで同じスキーマ規約。新しい表を足す手順が決まっている</a:t>
             </a:r>
           </a:p>
           <a:p>
@@ -22120,7 +22238,7 @@
                 <a:cs typeface="Meiryo"/>
                 <a:ea typeface="Meiryo"/>
               </a:rPr>
-              <a:t>先行整備した5ドメインを実装へ進める順番(③)</a:t>
+              <a:t>先行整備した6ドメインを実装へ進める順番(③)</a:t>
             </a:r>
           </a:p>
           <a:p>
@@ -23791,7 +23909,7 @@
                 <a:cs typeface="Meiryo"/>
                 <a:ea typeface="Meiryo"/>
               </a:rPr>
-              <a:t>データベース 34テーブル</a:t>
+              <a:t>データベース 44テーブル</a:t>
             </a:r>
             <a:r>
               <a:rPr sz="1050" b="0">
@@ -23802,7 +23920,7 @@
                 <a:cs typeface="Meiryo"/>
                 <a:ea typeface="Meiryo"/>
               </a:rPr>
-              <a:t> / マイグレーション5本</a:t>
+              <a:t> / マイグレーション6本</a:t>
             </a:r>
           </a:p>
         </p:txBody>
@@ -24018,7 +24136,7 @@
                 <a:cs typeface="Meiryo"/>
                 <a:ea typeface="Meiryo"/>
               </a:rPr>
-              <a:t>認証 / 顧客 / 日報・事故報告 / 領収書 / 勤怠(月次集計・カレンダー反映) / スタッフ管理 / RESERVA取込 / 割引クーポン / 公開デモ</a:t>
+              <a:t>認証 / 顧客 / 日報・事故報告 / 領収書 / 勤怠(月次集計・カレンダー反映) / スタッフ管理 / RESERVA取込 / 割引クーポン / AIプロンプト文面の編集(版管理) / 公開デモ</a:t>
             </a:r>
           </a:p>
         </p:txBody>
@@ -24366,7 +24484,7 @@
                 <a:cs typeface="Meiryo"/>
                 <a:ea typeface="Meiryo"/>
               </a:rPr>
-              <a:t>予約 / 請求・決済 / 顧客カルテ / 訪問割当の最適化 / 移動手当(表と制約はあるが、実装・API・画面は無い)</a:t>
+              <a:t>予約 / 請求・決済 / 顧客カルテ / 訪問割当の最適化 / 移動手当 / 日報AIの3軸(年齢帯・教育関心度・ストレス度)(表と制約はあるが、実装・API・画面は無い)</a:t>
             </a:r>
           </a:p>
         </p:txBody>
@@ -30710,7 +30828,7 @@
                 <a:ea typeface="Meiryo"/>
               </a:rPr>
               <a:t>「保存する」「送る」「暗号化する」という
-形(インターフェース)を29本定義している。
+形(インターフェース)を30本定義している。
 中身は書かない</a:t>
             </a:r>
           </a:p>

--- a/doc/slides/architecture.pptx
+++ b/doc/slides/architecture.pptx
@@ -17478,7 +17478,7 @@
                           <a:cs typeface="Meiryo"/>
                           <a:ea typeface="Meiryo"/>
                         </a:rPr>
-                        <a:t>表・制約・ドキュメントはある。リポジトリ実装・API・画面はこれから</a:t>
+                        <a:t>表・制約・組み立てロジック(3軸)はある。生成への接続・リポジトリ・API・画面はこれから</a:t>
                       </a:r>
                     </a:p>
                   </a:txBody>
@@ -20729,7 +20729,7 @@
                 <a:cs typeface="Meiryo"/>
                 <a:ea typeface="Meiryo"/>
               </a:rPr>
-              <a:t>予約・請求・カルテ・訪問最適化・移動手当・日報AIの3軸は、表と制約だけ先に用意してある。予約の二重取りだけはDBで止められておらず、アプリ側の責任になっている。</a:t>
+              <a:t>予約・請求・カルテ・訪問最適化・移動手当は表と制約のみ。日報AIの3軸は組み立てロジックまである。予約の二重取りはDBで止められず、アプリ側の責任。</a:t>
             </a:r>
           </a:p>
         </p:txBody>
@@ -24484,7 +24484,7 @@
                 <a:cs typeface="Meiryo"/>
                 <a:ea typeface="Meiryo"/>
               </a:rPr>
-              <a:t>予約 / 請求・決済 / 顧客カルテ / 訪問割当の最適化 / 移動手当 / 日報AIの3軸(年齢帯・教育関心度・ストレス度)(表と制約はあるが、実装・API・画面は無い)</a:t>
+              <a:t>予約 / 請求・決済 / 顧客カルテ / 訪問割当の最適化 / 移動手当は表と制約のみ。日報AIの3軸は表・制約・組み立てロジックはあるが、生成への接続・リポジトリ・API・画面はまだ無い</a:t>
             </a:r>
           </a:p>
         </p:txBody>

--- a/doc/slides/architecture.pptx
+++ b/doc/slides/architecture.pptx
@@ -3501,7 +3501,7 @@
                 <a:cs typeface="Meiryo"/>
                 <a:ea typeface="Meiryo"/>
               </a:rPr>
-              <a:t>窓口(ポート)の一覧 — 29本</a:t>
+              <a:t>窓口(ポート)の一覧 — 30本</a:t>
             </a:r>
             <a:r>
               <a:rPr sz="1250" b="0" i="0">
@@ -3740,7 +3740,7 @@
                 <a:cs typeface="Meiryo"/>
                 <a:ea typeface="Meiryo"/>
               </a:rPr>
-              <a:t>データの読み書き(15本)</a:t>
+              <a:t>データの読み書き(16本)</a:t>
             </a:r>
           </a:p>
         </p:txBody>
@@ -3769,7 +3769,7 @@
           <a:p>
             <a:pPr marL="182880" indent="-182880">
               <a:lnSpc>
-                <a:spcPct val="125000"/>
+                <a:spcPct val="120000"/>
               </a:lnSpc>
               <a:spcBef>
                 <a:spcPts val="0"/>
@@ -3795,10 +3795,10 @@
           <a:p>
             <a:pPr marL="182880" indent="-182880">
               <a:lnSpc>
-                <a:spcPct val="125000"/>
+                <a:spcPct val="120000"/>
               </a:lnSpc>
               <a:spcBef>
-                <a:spcPts val="550"/>
+                <a:spcPts val="350"/>
               </a:spcBef>
               <a:buClr>
                 <a:srgbClr val="0369A1"/>
@@ -3821,10 +3821,10 @@
           <a:p>
             <a:pPr marL="182880" indent="-182880">
               <a:lnSpc>
-                <a:spcPct val="125000"/>
+                <a:spcPct val="120000"/>
               </a:lnSpc>
               <a:spcBef>
-                <a:spcPts val="550"/>
+                <a:spcPts val="350"/>
               </a:spcBef>
               <a:buClr>
                 <a:srgbClr val="0369A1"/>
@@ -3847,10 +3847,10 @@
           <a:p>
             <a:pPr marL="182880" indent="-182880">
               <a:lnSpc>
-                <a:spcPct val="125000"/>
+                <a:spcPct val="120000"/>
               </a:lnSpc>
               <a:spcBef>
-                <a:spcPts val="550"/>
+                <a:spcPts val="350"/>
               </a:spcBef>
               <a:buClr>
                 <a:srgbClr val="0369A1"/>
@@ -3873,10 +3873,10 @@
           <a:p>
             <a:pPr marL="182880" indent="-182880">
               <a:lnSpc>
-                <a:spcPct val="125000"/>
+                <a:spcPct val="120000"/>
               </a:lnSpc>
               <a:spcBef>
-                <a:spcPts val="550"/>
+                <a:spcPts val="350"/>
               </a:spcBef>
               <a:buClr>
                 <a:srgbClr val="0369A1"/>
@@ -3899,10 +3899,10 @@
           <a:p>
             <a:pPr marL="182880" indent="-182880">
               <a:lnSpc>
-                <a:spcPct val="125000"/>
+                <a:spcPct val="120000"/>
               </a:lnSpc>
               <a:spcBef>
-                <a:spcPts val="550"/>
+                <a:spcPts val="350"/>
               </a:spcBef>
               <a:buClr>
                 <a:srgbClr val="0369A1"/>
@@ -3925,10 +3925,10 @@
           <a:p>
             <a:pPr marL="182880" indent="-182880">
               <a:lnSpc>
-                <a:spcPct val="125000"/>
+                <a:spcPct val="120000"/>
               </a:lnSpc>
               <a:spcBef>
-                <a:spcPts val="550"/>
+                <a:spcPts val="350"/>
               </a:spcBef>
               <a:buClr>
                 <a:srgbClr val="0369A1"/>
@@ -3951,10 +3951,10 @@
           <a:p>
             <a:pPr marL="182880" indent="-182880">
               <a:lnSpc>
-                <a:spcPct val="125000"/>
+                <a:spcPct val="120000"/>
               </a:lnSpc>
               <a:spcBef>
-                <a:spcPts val="550"/>
+                <a:spcPts val="350"/>
               </a:spcBef>
               <a:buClr>
                 <a:srgbClr val="0369A1"/>
@@ -3977,10 +3977,10 @@
           <a:p>
             <a:pPr marL="182880" indent="-182880">
               <a:lnSpc>
-                <a:spcPct val="125000"/>
+                <a:spcPct val="120000"/>
               </a:lnSpc>
               <a:spcBef>
-                <a:spcPts val="550"/>
+                <a:spcPts val="350"/>
               </a:spcBef>
               <a:buClr>
                 <a:srgbClr val="0369A1"/>
@@ -4003,10 +4003,10 @@
           <a:p>
             <a:pPr marL="182880" indent="-182880">
               <a:lnSpc>
-                <a:spcPct val="125000"/>
+                <a:spcPct val="120000"/>
               </a:lnSpc>
               <a:spcBef>
-                <a:spcPts val="550"/>
+                <a:spcPts val="350"/>
               </a:spcBef>
               <a:buClr>
                 <a:srgbClr val="0369A1"/>
@@ -4029,10 +4029,10 @@
           <a:p>
             <a:pPr marL="182880" indent="-182880">
               <a:lnSpc>
-                <a:spcPct val="125000"/>
+                <a:spcPct val="120000"/>
               </a:lnSpc>
               <a:spcBef>
-                <a:spcPts val="550"/>
+                <a:spcPts val="350"/>
               </a:spcBef>
               <a:buClr>
                 <a:srgbClr val="0369A1"/>
@@ -4055,10 +4055,10 @@
           <a:p>
             <a:pPr marL="182880" indent="-182880">
               <a:lnSpc>
-                <a:spcPct val="125000"/>
+                <a:spcPct val="120000"/>
               </a:lnSpc>
               <a:spcBef>
-                <a:spcPts val="550"/>
+                <a:spcPts val="350"/>
               </a:spcBef>
               <a:buClr>
                 <a:srgbClr val="0369A1"/>
@@ -4081,10 +4081,10 @@
           <a:p>
             <a:pPr marL="182880" indent="-182880">
               <a:lnSpc>
-                <a:spcPct val="125000"/>
+                <a:spcPct val="120000"/>
               </a:lnSpc>
               <a:spcBef>
-                <a:spcPts val="550"/>
+                <a:spcPts val="350"/>
               </a:spcBef>
               <a:buClr>
                 <a:srgbClr val="0369A1"/>
@@ -4107,10 +4107,10 @@
           <a:p>
             <a:pPr marL="182880" indent="-182880">
               <a:lnSpc>
-                <a:spcPct val="125000"/>
+                <a:spcPct val="120000"/>
               </a:lnSpc>
               <a:spcBef>
-                <a:spcPts val="550"/>
+                <a:spcPts val="350"/>
               </a:spcBef>
               <a:buClr>
                 <a:srgbClr val="0369A1"/>
@@ -4133,10 +4133,36 @@
           <a:p>
             <a:pPr marL="182880" indent="-182880">
               <a:lnSpc>
-                <a:spcPct val="125000"/>
+                <a:spcPct val="120000"/>
               </a:lnSpc>
               <a:spcBef>
-                <a:spcPts val="550"/>
+                <a:spcPts val="350"/>
+              </a:spcBef>
+              <a:buClr>
+                <a:srgbClr val="0369A1"/>
+              </a:buClr>
+              <a:buFont typeface="Meiryo"/>
+              <a:buChar char="▪"/>
+            </a:pPr>
+            <a:r>
+              <a:rPr sz="1050" b="0">
+                <a:solidFill>
+                  <a:srgbClr val="14223A"/>
+                </a:solidFill>
+                <a:latin typeface="Meiryo"/>
+                <a:cs typeface="Meiryo"/>
+                <a:ea typeface="Meiryo"/>
+              </a:rPr>
+              <a:t>PromptTemplate AIプロンプト文面</a:t>
+            </a:r>
+          </a:p>
+          <a:p>
+            <a:pPr marL="182880" indent="-182880">
+              <a:lnSpc>
+                <a:spcPct val="120000"/>
+              </a:lnSpc>
+              <a:spcBef>
+                <a:spcPts val="350"/>
               </a:spcBef>
               <a:buClr>
                 <a:srgbClr val="0369A1"/>
@@ -4290,7 +4316,7 @@
           <a:p>
             <a:pPr marL="182880" indent="-182880">
               <a:lnSpc>
-                <a:spcPct val="125000"/>
+                <a:spcPct val="120000"/>
               </a:lnSpc>
               <a:spcBef>
                 <a:spcPts val="0"/>
@@ -4316,10 +4342,10 @@
           <a:p>
             <a:pPr marL="182880" indent="-182880">
               <a:lnSpc>
-                <a:spcPct val="125000"/>
+                <a:spcPct val="120000"/>
               </a:lnSpc>
               <a:spcBef>
-                <a:spcPts val="550"/>
+                <a:spcPts val="350"/>
               </a:spcBef>
               <a:buClr>
                 <a:srgbClr val="6D28D9"/>
@@ -4342,10 +4368,10 @@
           <a:p>
             <a:pPr marL="182880" indent="-182880">
               <a:lnSpc>
-                <a:spcPct val="125000"/>
+                <a:spcPct val="120000"/>
               </a:lnSpc>
               <a:spcBef>
-                <a:spcPts val="550"/>
+                <a:spcPts val="350"/>
               </a:spcBef>
               <a:buClr>
                 <a:srgbClr val="6D28D9"/>
@@ -4368,10 +4394,10 @@
           <a:p>
             <a:pPr marL="182880" indent="-182880">
               <a:lnSpc>
-                <a:spcPct val="125000"/>
+                <a:spcPct val="120000"/>
               </a:lnSpc>
               <a:spcBef>
-                <a:spcPts val="550"/>
+                <a:spcPts val="350"/>
               </a:spcBef>
               <a:buClr>
                 <a:srgbClr val="6D28D9"/>
@@ -4394,10 +4420,10 @@
           <a:p>
             <a:pPr marL="182880" indent="-182880">
               <a:lnSpc>
-                <a:spcPct val="125000"/>
+                <a:spcPct val="120000"/>
               </a:lnSpc>
               <a:spcBef>
-                <a:spcPts val="550"/>
+                <a:spcPts val="350"/>
               </a:spcBef>
               <a:buClr>
                 <a:srgbClr val="6D28D9"/>
@@ -4420,10 +4446,10 @@
           <a:p>
             <a:pPr marL="182880" indent="-182880">
               <a:lnSpc>
-                <a:spcPct val="125000"/>
+                <a:spcPct val="120000"/>
               </a:lnSpc>
               <a:spcBef>
-                <a:spcPts val="550"/>
+                <a:spcPts val="350"/>
               </a:spcBef>
               <a:buClr>
                 <a:srgbClr val="6D28D9"/>
@@ -4446,10 +4472,10 @@
           <a:p>
             <a:pPr marL="182880" indent="-182880">
               <a:lnSpc>
-                <a:spcPct val="125000"/>
+                <a:spcPct val="120000"/>
               </a:lnSpc>
               <a:spcBef>
-                <a:spcPts val="550"/>
+                <a:spcPts val="350"/>
               </a:spcBef>
               <a:buClr>
                 <a:srgbClr val="6D28D9"/>
@@ -4472,10 +4498,10 @@
           <a:p>
             <a:pPr marL="182880" indent="-182880">
               <a:lnSpc>
-                <a:spcPct val="125000"/>
+                <a:spcPct val="120000"/>
               </a:lnSpc>
               <a:spcBef>
-                <a:spcPts val="550"/>
+                <a:spcPts val="350"/>
               </a:spcBef>
               <a:buClr>
                 <a:srgbClr val="6D28D9"/>
@@ -4498,10 +4524,10 @@
           <a:p>
             <a:pPr marL="182880" indent="-182880">
               <a:lnSpc>
-                <a:spcPct val="125000"/>
+                <a:spcPct val="120000"/>
               </a:lnSpc>
               <a:spcBef>
-                <a:spcPts val="550"/>
+                <a:spcPts val="350"/>
               </a:spcBef>
               <a:buClr>
                 <a:srgbClr val="6D28D9"/>
@@ -4655,7 +4681,7 @@
           <a:p>
             <a:pPr marL="182880" indent="-182880">
               <a:lnSpc>
-                <a:spcPct val="125000"/>
+                <a:spcPct val="120000"/>
               </a:lnSpc>
               <a:spcBef>
                 <a:spcPts val="0"/>
@@ -4681,10 +4707,10 @@
           <a:p>
             <a:pPr marL="182880" indent="-182880">
               <a:lnSpc>
-                <a:spcPct val="125000"/>
+                <a:spcPct val="120000"/>
               </a:lnSpc>
               <a:spcBef>
-                <a:spcPts val="550"/>
+                <a:spcPts val="350"/>
               </a:spcBef>
               <a:buClr>
                 <a:srgbClr val="047857"/>
@@ -4707,10 +4733,10 @@
           <a:p>
             <a:pPr marL="182880" indent="-182880">
               <a:lnSpc>
-                <a:spcPct val="125000"/>
+                <a:spcPct val="120000"/>
               </a:lnSpc>
               <a:spcBef>
-                <a:spcPts val="550"/>
+                <a:spcPts val="350"/>
               </a:spcBef>
               <a:buClr>
                 <a:srgbClr val="047857"/>
@@ -4733,10 +4759,10 @@
           <a:p>
             <a:pPr marL="182880" indent="-182880">
               <a:lnSpc>
-                <a:spcPct val="125000"/>
+                <a:spcPct val="120000"/>
               </a:lnSpc>
               <a:spcBef>
-                <a:spcPts val="550"/>
+                <a:spcPts val="350"/>
               </a:spcBef>
               <a:buClr>
                 <a:srgbClr val="047857"/>
@@ -4759,10 +4785,10 @@
           <a:p>
             <a:pPr marL="182880" indent="-182880">
               <a:lnSpc>
-                <a:spcPct val="125000"/>
+                <a:spcPct val="120000"/>
               </a:lnSpc>
               <a:spcBef>
-                <a:spcPts val="550"/>
+                <a:spcPts val="350"/>
               </a:spcBef>
               <a:buClr>
                 <a:srgbClr val="047857"/>
@@ -12276,7 +12302,7 @@
                 <a:cs typeface="Meiryo"/>
                 <a:ea typeface="Meiryo"/>
               </a:rPr>
-              <a:t>(業務データは平文。詳細は doc/slides/db-review.pptx P13)</a:t>
+              <a:t>(業務データは平文。詳細は doc/slides/db-review.pptx P15)</a:t>
             </a:r>
           </a:p>
           <a:p>
@@ -13470,7 +13496,7 @@
                 <a:cs typeface="Meiryo"/>
                 <a:ea typeface="Meiryo"/>
               </a:rPr>
-              <a:t>同じマイグレーション(34テーブル)・同じ行レベルセキュリティ・同じ業務ロジック・同じAPIルート</a:t>
+              <a:t>同じマイグレーション(44テーブル)・同じ行レベルセキュリティ・同じ業務ロジック・同じAPIルート</a:t>
             </a:r>
           </a:p>
           <a:p>
@@ -16530,7 +16556,7 @@
         </p:nvGraphicFramePr>
         <p:xfrm>
           <a:off x="457200" y="1170432"/>
-          <a:ext cx="11277293" cy="4325112"/>
+          <a:ext cx="11277293" cy="4206240"/>
         </p:xfrm>
         <a:graphic>
           <a:graphicData uri="http://schemas.openxmlformats.org/drawingml/2006/table">
@@ -16543,7 +16569,7 @@
                 <a:gridCol w="1443493"/>
                 <a:gridCol w="5864193"/>
               </a:tblGrid>
-              <a:tr h="301752">
+              <a:tr h="283464">
                 <a:tc>
                   <a:txBody>
                     <a:bodyPr wrap="square"/>
@@ -16635,7 +16661,7 @@
                   </a:tcPr>
                 </a:tc>
               </a:tr>
-              <a:tr h="402336">
+              <a:tr h="356616">
                 <a:tc>
                   <a:txBody>
                     <a:bodyPr wrap="square"/>
@@ -16716,7 +16742,7 @@
                           <a:cs typeface="Meiryo"/>
                           <a:ea typeface="Meiryo"/>
                         </a:rPr>
-                        <a:t>34テーブル、複合外部キー、FORCE。静的検査と実DB検証をCIで実行</a:t>
+                        <a:t>44テーブル、複合外部キー、FORCE。静的検査と実DB検証をCIで実行</a:t>
                       </a:r>
                     </a:p>
                   </a:txBody>
@@ -16727,7 +16753,7 @@
                   </a:tcPr>
                 </a:tc>
               </a:tr>
-              <a:tr h="402336">
+              <a:tr h="356616">
                 <a:tc>
                   <a:txBody>
                     <a:bodyPr wrap="square"/>
@@ -16819,7 +16845,7 @@
                   </a:tcPr>
                 </a:tc>
               </a:tr>
-              <a:tr h="402336">
+              <a:tr h="356616">
                 <a:tc>
                   <a:txBody>
                     <a:bodyPr wrap="square"/>
@@ -16911,7 +16937,7 @@
                   </a:tcPr>
                 </a:tc>
               </a:tr>
-              <a:tr h="402336">
+              <a:tr h="356616">
                 <a:tc>
                   <a:txBody>
                     <a:bodyPr wrap="square"/>
@@ -17003,7 +17029,7 @@
                   </a:tcPr>
                 </a:tc>
               </a:tr>
-              <a:tr h="402336">
+              <a:tr h="356616">
                 <a:tc>
                   <a:txBody>
                     <a:bodyPr wrap="square"/>
@@ -17095,7 +17121,7 @@
                   </a:tcPr>
                 </a:tc>
               </a:tr>
-              <a:tr h="402336">
+              <a:tr h="356616">
                 <a:tc>
                   <a:txBody>
                     <a:bodyPr wrap="square"/>
@@ -17187,7 +17213,7 @@
                   </a:tcPr>
                 </a:tc>
               </a:tr>
-              <a:tr h="402336">
+              <a:tr h="356616">
                 <a:tc>
                   <a:txBody>
                     <a:bodyPr wrap="square"/>
@@ -17279,7 +17305,7 @@
                   </a:tcPr>
                 </a:tc>
               </a:tr>
-              <a:tr h="402336">
+              <a:tr h="356616">
                 <a:tc>
                   <a:txBody>
                     <a:bodyPr wrap="square"/>
@@ -17300,13 +17326,105 @@
                           <a:cs typeface="Meiryo"/>
                           <a:ea typeface="Meiryo"/>
                         </a:rPr>
-                        <a:t>予約・請求・カルテ</a:t>
+                        <a:t>AIプロンプトの文面を管理者が編集</a:t>
                       </a:r>
                     </a:p>
                   </a:txBody>
                   <a:tcPr marL="64008" marR="64008" marT="27432" marB="27432" anchor="ctr">
                     <a:solidFill>
                       <a:srgbClr val="F8FAFC"/>
+                    </a:solidFill>
+                  </a:tcPr>
+                </a:tc>
+                <a:tc>
+                  <a:txBody>
+                    <a:bodyPr wrap="square"/>
+                    <a:lstStyle/>
+                    <a:p>
+                      <a:pPr algn="ctr">
+                        <a:lnSpc>
+                          <a:spcPct val="115000"/>
+                        </a:lnSpc>
+                        <a:buNone/>
+                      </a:pPr>
+                      <a:r>
+                        <a:rPr sz="1050" b="0">
+                          <a:solidFill>
+                            <a:srgbClr val="047857"/>
+                          </a:solidFill>
+                          <a:latin typeface="Meiryo"/>
+                          <a:cs typeface="Meiryo"/>
+                          <a:ea typeface="Meiryo"/>
+                        </a:rPr>
+                        <a:t>実装済み</a:t>
+                      </a:r>
+                    </a:p>
+                  </a:txBody>
+                  <a:tcPr marL="64008" marR="64008" marT="27432" marB="27432" anchor="ctr">
+                    <a:solidFill>
+                      <a:srgbClr val="F8FAFC"/>
+                    </a:solidFill>
+                  </a:tcPr>
+                </a:tc>
+                <a:tc>
+                  <a:txBody>
+                    <a:bodyPr wrap="square"/>
+                    <a:lstStyle/>
+                    <a:p>
+                      <a:pPr algn="l">
+                        <a:lnSpc>
+                          <a:spcPct val="115000"/>
+                        </a:lnSpc>
+                        <a:buNone/>
+                      </a:pPr>
+                      <a:r>
+                        <a:rPr sz="1050" b="0">
+                          <a:solidFill>
+                            <a:srgbClr val="14223A"/>
+                          </a:solidFill>
+                          <a:latin typeface="Meiryo"/>
+                          <a:cs typeface="Meiryo"/>
+                          <a:ea typeface="Meiryo"/>
+                        </a:rPr>
+                        <a:t>文面はDBで版管理(上書きしない)。管理画面から編集・履歴・既定に戻すまで動く</a:t>
+                      </a:r>
+                    </a:p>
+                  </a:txBody>
+                  <a:tcPr marL="64008" marR="64008" marT="27432" marB="27432" anchor="ctr">
+                    <a:solidFill>
+                      <a:srgbClr val="F8FAFC"/>
+                    </a:solidFill>
+                  </a:tcPr>
+                </a:tc>
+              </a:tr>
+              <a:tr h="356616">
+                <a:tc>
+                  <a:txBody>
+                    <a:bodyPr wrap="square"/>
+                    <a:lstStyle/>
+                    <a:p>
+                      <a:pPr algn="l">
+                        <a:lnSpc>
+                          <a:spcPct val="115000"/>
+                        </a:lnSpc>
+                        <a:buNone/>
+                      </a:pPr>
+                      <a:r>
+                        <a:rPr sz="1050" b="1">
+                          <a:solidFill>
+                            <a:srgbClr val="14223A"/>
+                          </a:solidFill>
+                          <a:latin typeface="Meiryo"/>
+                          <a:cs typeface="Meiryo"/>
+                          <a:ea typeface="Meiryo"/>
+                        </a:rPr>
+                        <a:t>予約・請求・カルテ・日報AIの3軸</a:t>
+                      </a:r>
+                    </a:p>
+                  </a:txBody>
+                  <a:tcPr marL="64008" marR="64008" marT="27432" marB="27432" anchor="ctr">
+                    <a:solidFill>
+                      <a:srgbClr val="FFFFFF"/>
                     </a:solidFill>
                   </a:tcPr>
                 </a:tc>
@@ -17336,7 +17454,7 @@
                   </a:txBody>
                   <a:tcPr marL="64008" marR="64008" marT="27432" marB="27432" anchor="ctr">
                     <a:solidFill>
-                      <a:srgbClr val="F8FAFC"/>
+                      <a:srgbClr val="FFFFFF"/>
                     </a:solidFill>
                   </a:tcPr>
                 </a:tc>
@@ -17360,18 +17478,18 @@
                           <a:cs typeface="Meiryo"/>
                           <a:ea typeface="Meiryo"/>
                         </a:rPr>
-                        <a:t>表・制約・ドキュメントはある。リポジトリ実装・API・画面はこれから</a:t>
+                        <a:t>表・制約・組み立てロジック(3軸)はある。生成への接続・リポジトリ・API・画面はこれから</a:t>
                       </a:r>
                     </a:p>
                   </a:txBody>
                   <a:tcPr marL="64008" marR="64008" marT="27432" marB="27432" anchor="ctr">
                     <a:solidFill>
-                      <a:srgbClr val="F8FAFC"/>
+                      <a:srgbClr val="FFFFFF"/>
                     </a:solidFill>
                   </a:tcPr>
                 </a:tc>
               </a:tr>
-              <a:tr h="402336">
+              <a:tr h="356616">
                 <a:tc>
                   <a:txBody>
                     <a:bodyPr wrap="square"/>
@@ -17398,7 +17516,7 @@
                   </a:txBody>
                   <a:tcPr marL="64008" marR="64008" marT="27432" marB="27432" anchor="ctr">
                     <a:solidFill>
-                      <a:srgbClr val="FFFFFF"/>
+                      <a:srgbClr val="F8FAFC"/>
                     </a:solidFill>
                   </a:tcPr>
                 </a:tc>
@@ -17428,7 +17546,7 @@
                   </a:txBody>
                   <a:tcPr marL="64008" marR="64008" marT="27432" marB="27432" anchor="ctr">
                     <a:solidFill>
-                      <a:srgbClr val="FFFFFF"/>
+                      <a:srgbClr val="F8FAFC"/>
                     </a:solidFill>
                   </a:tcPr>
                 </a:tc>
@@ -17458,12 +17576,12 @@
                   </a:txBody>
                   <a:tcPr marL="64008" marR="64008" marT="27432" marB="27432" anchor="ctr">
                     <a:solidFill>
-                      <a:srgbClr val="FFFFFF"/>
+                      <a:srgbClr val="F8FAFC"/>
                     </a:solidFill>
                   </a:tcPr>
                 </a:tc>
               </a:tr>
-              <a:tr h="402336">
+              <a:tr h="356616">
                 <a:tc>
                   <a:txBody>
                     <a:bodyPr wrap="square"/>
@@ -17490,7 +17608,7 @@
                   </a:txBody>
                   <a:tcPr marL="64008" marR="64008" marT="27432" marB="27432" anchor="ctr">
                     <a:solidFill>
-                      <a:srgbClr val="F8FAFC"/>
+                      <a:srgbClr val="FFFFFF"/>
                     </a:solidFill>
                   </a:tcPr>
                 </a:tc>
@@ -17520,7 +17638,7 @@
                   </a:txBody>
                   <a:tcPr marL="64008" marR="64008" marT="27432" marB="27432" anchor="ctr">
                     <a:solidFill>
-                      <a:srgbClr val="F8FAFC"/>
+                      <a:srgbClr val="FFFFFF"/>
                     </a:solidFill>
                   </a:tcPr>
                 </a:tc>
@@ -17550,7 +17668,7 @@
                   </a:txBody>
                   <a:tcPr marL="64008" marR="64008" marT="27432" marB="27432" anchor="ctr">
                     <a:solidFill>
-                      <a:srgbClr val="F8FAFC"/>
+                      <a:srgbClr val="FFFFFF"/>
                     </a:solidFill>
                   </a:tcPr>
                 </a:tc>
@@ -20569,7 +20687,7 @@
                 <a:cs typeface="Meiryo"/>
                 <a:ea typeface="Meiryo"/>
               </a:rPr>
-              <a:t>先行整備した5ドメインの進め方</a:t>
+              <a:t>先行整備した6ドメインの進め方</a:t>
             </a:r>
           </a:p>
         </p:txBody>
@@ -20611,7 +20729,7 @@
                 <a:cs typeface="Meiryo"/>
                 <a:ea typeface="Meiryo"/>
               </a:rPr>
-              <a:t>予約・請求・カルテ・訪問最適化・移動手当は、表と制約だけ先に用意してある。予約の二重取りだけはDBで止められておらず、アプリ側の責任になっている。</a:t>
+              <a:t>予約・請求・カルテ・訪問最適化・移動手当は表と制約のみ。日報AIの3軸は組み立てロジックまである。予約の二重取りはDBで止められず、アプリ側の責任。</a:t>
             </a:r>
           </a:p>
         </p:txBody>
@@ -21859,7 +21977,7 @@
                 <a:cs typeface="Meiryo"/>
                 <a:ea typeface="Meiryo"/>
               </a:rPr>
-              <a:t>34テーブルすべてで同じスキーマ規約。新しい表を足す手順が決まっている</a:t>
+              <a:t>44テーブルすべてで同じスキーマ規約。新しい表を足す手順が決まっている</a:t>
             </a:r>
           </a:p>
           <a:p>
@@ -22120,7 +22238,7 @@
                 <a:cs typeface="Meiryo"/>
                 <a:ea typeface="Meiryo"/>
               </a:rPr>
-              <a:t>先行整備した5ドメインを実装へ進める順番(③)</a:t>
+              <a:t>先行整備した6ドメインを実装へ進める順番(③)</a:t>
             </a:r>
           </a:p>
           <a:p>
@@ -23791,7 +23909,7 @@
                 <a:cs typeface="Meiryo"/>
                 <a:ea typeface="Meiryo"/>
               </a:rPr>
-              <a:t>データベース 34テーブル</a:t>
+              <a:t>データベース 44テーブル</a:t>
             </a:r>
             <a:r>
               <a:rPr sz="1050" b="0">
@@ -23802,7 +23920,7 @@
                 <a:cs typeface="Meiryo"/>
                 <a:ea typeface="Meiryo"/>
               </a:rPr>
-              <a:t> / マイグレーション5本</a:t>
+              <a:t> / マイグレーション6本</a:t>
             </a:r>
           </a:p>
         </p:txBody>
@@ -24018,7 +24136,7 @@
                 <a:cs typeface="Meiryo"/>
                 <a:ea typeface="Meiryo"/>
               </a:rPr>
-              <a:t>認証 / 顧客 / 日報・事故報告 / 領収書 / 勤怠(月次集計・カレンダー反映) / スタッフ管理 / RESERVA取込 / 割引クーポン / 公開デモ</a:t>
+              <a:t>認証 / 顧客 / 日報・事故報告 / 領収書 / 勤怠(月次集計・カレンダー反映) / スタッフ管理 / RESERVA取込 / 割引クーポン / AIプロンプト文面の編集(版管理) / 公開デモ</a:t>
             </a:r>
           </a:p>
         </p:txBody>
@@ -24366,7 +24484,7 @@
                 <a:cs typeface="Meiryo"/>
                 <a:ea typeface="Meiryo"/>
               </a:rPr>
-              <a:t>予約 / 請求・決済 / 顧客カルテ / 訪問割当の最適化 / 移動手当(表と制約はあるが、実装・API・画面は無い)</a:t>
+              <a:t>予約 / 請求・決済 / 顧客カルテ / 訪問割当の最適化 / 移動手当は表と制約のみ。日報AIの3軸は表・制約・組み立てロジックはあるが、生成への接続・リポジトリ・API・画面はまだ無い</a:t>
             </a:r>
           </a:p>
         </p:txBody>
@@ -30710,7 +30828,7 @@
                 <a:ea typeface="Meiryo"/>
               </a:rPr>
               <a:t>「保存する」「送る」「暗号化する」という
-形(インターフェース)を29本定義している。
+形(インターフェース)を30本定義している。
 中身は書かない</a:t>
             </a:r>
           </a:p>

--- a/doc/slides/architecture.pptx
+++ b/doc/slides/architecture.pptx
@@ -3501,7 +3501,7 @@
                 <a:cs typeface="Meiryo"/>
                 <a:ea typeface="Meiryo"/>
               </a:rPr>
-              <a:t>窓口(ポート)の一覧 — 30本</a:t>
+              <a:t>窓口(ポート)の一覧 — 33本</a:t>
             </a:r>
             <a:r>
               <a:rPr sz="1250" b="0" i="0">
@@ -3740,7 +3740,7 @@
                 <a:cs typeface="Meiryo"/>
                 <a:ea typeface="Meiryo"/>
               </a:rPr>
-              <a:t>データの読み書き(16本)</a:t>
+              <a:t>データの読み書き(19本)</a:t>
             </a:r>
           </a:p>
         </p:txBody>
@@ -4180,6 +4180,84 @@
                 <a:ea typeface="Meiryo"/>
               </a:rPr>
               <a:t>TenantKey 暗号鍵</a:t>
+            </a:r>
+          </a:p>
+          <a:p>
+            <a:pPr marL="182880" indent="-182880">
+              <a:lnSpc>
+                <a:spcPct val="120000"/>
+              </a:lnSpc>
+              <a:spcBef>
+                <a:spcPts val="350"/>
+              </a:spcBef>
+              <a:buClr>
+                <a:srgbClr val="0369A1"/>
+              </a:buClr>
+              <a:buFont typeface="Meiryo"/>
+              <a:buChar char="▪"/>
+            </a:pPr>
+            <a:r>
+              <a:rPr sz="1050" b="0">
+                <a:solidFill>
+                  <a:srgbClr val="14223A"/>
+                </a:solidFill>
+                <a:latin typeface="Meiryo"/>
+                <a:cs typeface="Meiryo"/>
+                <a:ea typeface="Meiryo"/>
+              </a:rPr>
+              <a:t>ReportAiConfig 日報AIの3軸設定</a:t>
+            </a:r>
+          </a:p>
+          <a:p>
+            <a:pPr marL="182880" indent="-182880">
+              <a:lnSpc>
+                <a:spcPct val="120000"/>
+              </a:lnSpc>
+              <a:spcBef>
+                <a:spcPts val="350"/>
+              </a:spcBef>
+              <a:buClr>
+                <a:srgbClr val="0369A1"/>
+              </a:buClr>
+              <a:buFont typeface="Meiryo"/>
+              <a:buChar char="▪"/>
+            </a:pPr>
+            <a:r>
+              <a:rPr sz="1050" b="0">
+                <a:solidFill>
+                  <a:srgbClr val="14223A"/>
+                </a:solidFill>
+                <a:latin typeface="Meiryo"/>
+                <a:cs typeface="Meiryo"/>
+                <a:ea typeface="Meiryo"/>
+              </a:rPr>
+              <a:t>CustomerReportProfile 家庭ごとの★</a:t>
+            </a:r>
+          </a:p>
+          <a:p>
+            <a:pPr marL="182880" indent="-182880">
+              <a:lnSpc>
+                <a:spcPct val="120000"/>
+              </a:lnSpc>
+              <a:spcBef>
+                <a:spcPts val="350"/>
+              </a:spcBef>
+              <a:buClr>
+                <a:srgbClr val="0369A1"/>
+              </a:buClr>
+              <a:buFont typeface="Meiryo"/>
+              <a:buChar char="▪"/>
+            </a:pPr>
+            <a:r>
+              <a:rPr sz="1050" b="0">
+                <a:solidFill>
+                  <a:srgbClr val="14223A"/>
+                </a:solidFill>
+                <a:latin typeface="Meiryo"/>
+                <a:cs typeface="Meiryo"/>
+                <a:ea typeface="Meiryo"/>
+              </a:rPr>
+              <a:t>ReportAiGeneration AI生成の記録</a:t>
             </a:r>
           </a:p>
         </p:txBody>
@@ -17326,7 +17404,7 @@
                           <a:cs typeface="Meiryo"/>
                           <a:ea typeface="Meiryo"/>
                         </a:rPr>
-                        <a:t>AIプロンプトの文面を管理者が編集</a:t>
+                        <a:t>AIプロンプトの文面編集・日報AIの3軸(年齢帯×教育関心度×ストレス度)</a:t>
                       </a:r>
                     </a:p>
                   </a:txBody>
@@ -17386,7 +17464,7 @@
                           <a:cs typeface="Meiryo"/>
                           <a:ea typeface="Meiryo"/>
                         </a:rPr>
-                        <a:t>文面はDBで版管理(上書きしない)。管理画面から編集・履歴・既定に戻すまで動く</a:t>
+                        <a:t>文面はDBで版管理。3軸は表・管理画面・生成API・保存・記録(保持期間つき)まで接続済み</a:t>
                       </a:r>
                     </a:p>
                   </a:txBody>
@@ -17418,7 +17496,7 @@
                           <a:cs typeface="Meiryo"/>
                           <a:ea typeface="Meiryo"/>
                         </a:rPr>
-                        <a:t>予約・請求・カルテ・日報AIの3軸</a:t>
+                        <a:t>予約・請求・カルテ・訪問割当の最適化・移動手当</a:t>
                       </a:r>
                     </a:p>
                   </a:txBody>
@@ -17478,7 +17556,7 @@
                           <a:cs typeface="Meiryo"/>
                           <a:ea typeface="Meiryo"/>
                         </a:rPr>
-                        <a:t>表・制約・組み立てロジック(3軸)はある。生成への接続・リポジトリ・API・画面はこれから</a:t>
+                        <a:t>表と制約のみ。リポジトリ・API・画面はこれから</a:t>
                       </a:r>
                     </a:p>
                   </a:txBody>
@@ -20687,7 +20765,7 @@
                 <a:cs typeface="Meiryo"/>
                 <a:ea typeface="Meiryo"/>
               </a:rPr>
-              <a:t>先行整備した6ドメインの進め方</a:t>
+              <a:t>先行整備した5ドメインの進め方</a:t>
             </a:r>
           </a:p>
         </p:txBody>
@@ -20729,7 +20807,7 @@
                 <a:cs typeface="Meiryo"/>
                 <a:ea typeface="Meiryo"/>
               </a:rPr>
-              <a:t>予約・請求・カルテ・訪問最適化・移動手当は表と制約のみ。日報AIの3軸は組み立てロジックまである。予約の二重取りはDBで止められず、アプリ側の責任。</a:t>
+              <a:t>予約・請求・カルテ・訪問最適化・移動手当は表と制約のみ(日報AIの3軸は実装済みで対象外)。予約の二重取りはDBで止められず、アプリ側の責任。</a:t>
             </a:r>
           </a:p>
         </p:txBody>
@@ -22238,7 +22316,7 @@
                 <a:cs typeface="Meiryo"/>
                 <a:ea typeface="Meiryo"/>
               </a:rPr>
-              <a:t>先行整備した6ドメインを実装へ進める順番(③)</a:t>
+              <a:t>先行整備した5ドメインを実装へ進める順番(③)</a:t>
             </a:r>
           </a:p>
           <a:p>
@@ -24136,7 +24214,7 @@
                 <a:cs typeface="Meiryo"/>
                 <a:ea typeface="Meiryo"/>
               </a:rPr>
-              <a:t>認証 / 顧客 / 日報・事故報告 / 領収書 / 勤怠(月次集計・カレンダー反映) / スタッフ管理 / RESERVA取込 / 割引クーポン / AIプロンプト文面の編集(版管理) / 公開デモ</a:t>
+              <a:t>認証 / 顧客 / 日報・事故報告 / 領収書 / 勤怠(月次集計・カレンダー反映) / スタッフ管理 / RESERVA取込 / 割引クーポン / AIプロンプト文面の編集(版管理)・日報AIの3軸(年齢帯×教育関心度×ストレス度)まで接続 / 公開デモ</a:t>
             </a:r>
           </a:p>
         </p:txBody>
@@ -24484,7 +24562,7 @@
                 <a:cs typeface="Meiryo"/>
                 <a:ea typeface="Meiryo"/>
               </a:rPr>
-              <a:t>予約 / 請求・決済 / 顧客カルテ / 訪問割当の最適化 / 移動手当は表と制約のみ。日報AIの3軸は表・制約・組み立てロジックはあるが、生成への接続・リポジトリ・API・画面はまだ無い</a:t>
+              <a:t>予約 / 請求・決済 / 顧客カルテ / 訪問割当の最適化 / 移動手当は表と制約のみ</a:t>
             </a:r>
           </a:p>
         </p:txBody>
@@ -30828,7 +30906,7 @@
                 <a:ea typeface="Meiryo"/>
               </a:rPr>
               <a:t>「保存する」「送る」「暗号化する」という
-形(インターフェース)を30本定義している。
+形(インターフェース)を33本定義している。
 中身は書かない</a:t>
             </a:r>
           </a:p>

--- a/doc/slides/architecture.pptx
+++ b/doc/slides/architecture.pptx
@@ -3512,7 +3512,7 @@
                 <a:cs typeface="Meiryo"/>
                 <a:ea typeface="Meiryo"/>
               </a:rPr>
-              <a:t>   core が「外にこれをやってほしい」と宣言しているものの全体</a:t>
+              <a:t>   core が外部に求める処理を宣言したもの</a:t>
             </a:r>
           </a:p>
         </p:txBody>
@@ -5017,7 +5017,7 @@
                 <a:cs typeface="Meiryo"/>
                 <a:ea typeface="Meiryo"/>
               </a:rPr>
-              <a:t>「窓口だけ定義する」ことの実利</a:t>
+              <a:t>窓口だけを定義する効果</a:t>
             </a:r>
           </a:p>
         </p:txBody>
@@ -5198,7 +5198,7 @@
                 <a:cs typeface="Meiryo"/>
                 <a:ea typeface="Meiryo"/>
               </a:rPr>
-              <a:t>窓口の束(Container)</a:t>
+              <a:t>ポートの集約(Container)</a:t>
             </a:r>
           </a:p>
         </p:txBody>
@@ -5240,7 +5240,7 @@
                 <a:cs typeface="Meiryo"/>
                 <a:ea typeface="Meiryo"/>
               </a:rPr>
-              <a:t>全ポートの実装をまとめた「束」を1つ作り、それを usecase に渡します。Node.js用とブラウザ用の2種類の束が、同じ型で用意されています。</a:t>
+              <a:t>全ポートの実装を1つにまとめ、それを usecase に渡します。Node.js用とブラウザ用の2種類を、同じ型で用意しています。</a:t>
             </a:r>
           </a:p>
         </p:txBody>
@@ -5355,7 +5355,7 @@
                 <a:cs typeface="Meiryo"/>
                 <a:ea typeface="Meiryo"/>
               </a:rPr>
-              <a:t>   「日報を保存する」で何が起きるか</a:t>
+              <a:t>   日報を保存するときに何が起きるか</a:t>
             </a:r>
           </a:p>
         </p:txBody>
@@ -5908,7 +5908,7 @@
                 <a:cs typeface="Meiryo"/>
                 <a:ea typeface="Meiryo"/>
               </a:rPr>
-              <a:t>usecase が「日報を保存する」手順を実行</a:t>
+              <a:t>usecase が日報を保存する手順を実行</a:t>
             </a:r>
           </a:p>
         </p:txBody>
@@ -6077,7 +6077,7 @@
                 <a:cs typeface="Meiryo"/>
                 <a:ea typeface="Meiryo"/>
               </a:rPr>
-              <a:t>日報の行 + 送信予定(outbox)を揃って確定</a:t>
+              <a:t>日報の行と送信予定(outbox)を同時に確定</a:t>
             </a:r>
           </a:p>
         </p:txBody>
@@ -6780,7 +6780,7 @@
                 <a:cs typeface="Meiryo"/>
                 <a:ea typeface="Meiryo"/>
               </a:rPr>
-              <a:t>要点:④で「日報の行」と「送信予定」を同じトランザクションで確定させる。片方だけ通ると、誰にも気づかれない取り残しが生まれる。</a:t>
+              <a:t>④で日報の行と送信予定を同じトランザクションで確定させる。片方だけ通ると、検知できない取り残しが残る。</a:t>
             </a:r>
           </a:p>
         </p:txBody>
@@ -7056,7 +7056,7 @@
                 <a:cs typeface="Meiryo"/>
                 <a:ea typeface="Meiryo"/>
               </a:rPr>
-              <a:t>現行のGAS版との共存、認証、AI、そして公開デモ</a:t>
+              <a:t>現行のGAS版との共存、認証、AI、公開デモ</a:t>
             </a:r>
           </a:p>
         </p:txBody>
@@ -7171,7 +7171,7 @@
                 <a:cs typeface="Meiryo"/>
                 <a:ea typeface="Meiryo"/>
               </a:rPr>
-              <a:t>   正データはPostgreSQL、スプレッドシートは「写し」</a:t>
+              <a:t>   正データはPostgreSQL、スプレッドシートは写し</a:t>
             </a:r>
           </a:p>
         </p:txBody>
@@ -8031,7 +8031,7 @@
                 <a:cs typeface="Meiryo"/>
                 <a:ea typeface="Meiryo"/>
               </a:rPr>
-              <a:t>失敗を終端にしない設計</a:t>
+              <a:t>送信失敗時の再試行</a:t>
             </a:r>
           </a:p>
         </p:txBody>
@@ -8106,7 +8106,7 @@
                 <a:cs typeface="Meiryo"/>
                 <a:ea typeface="Meiryo"/>
               </a:rPr>
-              <a:t>失敗扱いになった件数はエラーログに出るので、運用が気づける</a:t>
+              <a:t>失敗扱いになった件数はエラーログに出るため、運用側で把握できる</a:t>
             </a:r>
           </a:p>
           <a:p>
@@ -8348,7 +8348,7 @@
                 <a:cs typeface="Meiryo"/>
                 <a:ea typeface="Meiryo"/>
               </a:rPr>
-              <a:t>メール・地図・予定・スプレッドシートすべてがGAS Web App 1本を経由。実行時間制限・クォータあり、SLAなし</a:t>
+              <a:t>メール・地図・予定・スプレッドシートがGAS Web App 1本を経由。実行時間制限・クォータあり、SLAなし</a:t>
             </a:r>
           </a:p>
         </p:txBody>
@@ -8480,7 +8480,7 @@
                 <a:cs typeface="Meiryo"/>
                 <a:ea typeface="Meiryo"/>
               </a:rPr>
-              <a:t>まだ一度もデプロイしていない</a:t>
+              <a:t>まだデプロイしていない</a:t>
             </a:r>
           </a:p>
         </p:txBody>
@@ -8522,7 +8522,7 @@
                 <a:cs typeface="Meiryo"/>
                 <a:ea typeface="Meiryo"/>
               </a:rPr>
-              <a:t>スプレッドシートへの書き戻しとメール送信は、一度も本番で動いたことがない。メール送信の処理はGAS側に存在すらしない</a:t>
+              <a:t>スプレッドシートへの書き戻しとメール送信は、本番で動かしたことがない。メール送信の処理はGAS側にまだ無い</a:t>
             </a:r>
           </a:p>
         </p:txBody>
@@ -9044,7 +9044,7 @@
                 <a:cs typeface="Meiryo"/>
                 <a:ea typeface="Meiryo"/>
               </a:rPr>
-              <a:t>(a) この依存のまま早期にデプロイして運用設計を詰める  (b) メール送信だけ別経路(SES / SendGrid等)に逃がす  (c) スプレッドシート連携そのものを移行対象から外す</a:t>
+              <a:t>(a) この依存のまま早期にデプロイして運用設計を詰める  (b) メール送信だけ別経路(SES / SendGrid等)に分ける  (c) スプレッドシート連携そのものを移行対象から外す</a:t>
             </a:r>
           </a:p>
         </p:txBody>
@@ -9321,7 +9321,7 @@
                 <a:cs typeface="Meiryo"/>
                 <a:ea typeface="Meiryo"/>
               </a:rPr>
-              <a:t>変更した理由:GAS版の既存パスワードをそのまま引き継ぎ、スタッフに再設定を強いないため。初回ログイン時に古い方式のハッシュを黙って新方式へ入れ替える。</a:t>
+              <a:t>変更した理由は、GAS版の既存パスワードを引き継ぎ、スタッフに再設定を求めないため。初回ログイン時に、古い方式のハッシュを新方式へ入れ替える。</a:t>
             </a:r>
           </a:p>
         </p:txBody>
@@ -10268,7 +10268,7 @@
                 <a:cs typeface="Meiryo"/>
                 <a:ea typeface="Meiryo"/>
               </a:rPr>
-              <a:t>総当たり・列挙を塞いだところ</a:t>
+              <a:t>総当たりと列挙への対策</a:t>
             </a:r>
           </a:p>
         </p:txBody>
@@ -10343,7 +10343,7 @@
                 <a:cs typeface="Meiryo"/>
                 <a:ea typeface="Meiryo"/>
               </a:rPr>
-              <a:t>ロック中かどうかで応答を変えない(アカウントの有無が分かってしまうため)</a:t>
+              <a:t>ロック中かどうかで応答を変えない(アカウントの有無が分かるため)</a:t>
             </a:r>
           </a:p>
           <a:p>
@@ -10529,7 +10529,7 @@
                 <a:cs typeface="Meiryo"/>
                 <a:ea typeface="Meiryo"/>
               </a:rPr>
-              <a:t>書き込みを守るところ</a:t>
+              <a:t>書き込み側の保護</a:t>
             </a:r>
           </a:p>
         </p:txBody>
@@ -10630,7 +10630,7 @@
                 <a:cs typeface="Meiryo"/>
                 <a:ea typeface="Meiryo"/>
               </a:rPr>
-              <a:t>パスワードの差し替えは、行をロックして「差し替え → セッション全破棄」を1つのトランザクションで行う</a:t>
+              <a:t>パスワードの差し替えは、行をロックして差し替えとセッション破棄を1つのトランザクションで行う</a:t>
             </a:r>
           </a:p>
           <a:p>
@@ -10656,7 +10656,7 @@
                 <a:cs typeface="Meiryo"/>
                 <a:ea typeface="Meiryo"/>
               </a:rPr>
-              <a:t>ログインの成否・パスワード変更・管理者操作を「誰が・誰を」付きでログに残す</a:t>
+              <a:t>ログインの成否・パスワード変更・管理者操作を、実行者と対象付きでログに残す</a:t>
             </a:r>
           </a:p>
         </p:txBody>
@@ -10830,7 +10830,7 @@
                 <a:cs typeface="Meiryo"/>
                 <a:ea typeface="Meiryo"/>
               </a:rPr>
-              <a:t>絞り込みがアカウント単位のみ</a:t>
+              <a:t>制限がアカウント単位のみ</a:t>
             </a:r>
           </a:p>
         </p:txBody>
@@ -11308,7 +11308,7 @@
                 <a:cs typeface="Meiryo"/>
                 <a:ea typeface="Meiryo"/>
               </a:rPr>
-              <a:t>認証は「失敗する経路」を数え上げて塞ぐ作業でした。テストも、失敗すべきときに失敗することを中心に書いています。</a:t>
+              <a:t>テストは、失敗すべき経路で確実に失敗することを中心に書いています。</a:t>
             </a:r>
           </a:p>
         </p:txBody>
@@ -11423,7 +11423,7 @@
                 <a:cs typeface="Meiryo"/>
                 <a:ea typeface="Meiryo"/>
               </a:rPr>
-              <a:t>   生成物より「元の入力」を残すことを優先している</a:t>
+              <a:t>   生成物だけでなく、元の入力も残している</a:t>
             </a:r>
           </a:p>
         </p:txBody>
@@ -12108,7 +12108,7 @@
                 <a:cs typeface="Meiryo"/>
                 <a:ea typeface="Meiryo"/>
               </a:rPr>
-              <a:t>. 生成物だけを残すと、あとから「元は何と書かれていたか」を確かめられない</a:t>
+              <a:t>. 生成物だけを残すと、元の記述を後から確かめられない</a:t>
             </a:r>
           </a:p>
           <a:p>
@@ -12134,7 +12134,7 @@
                 <a:cs typeface="Meiryo"/>
                 <a:ea typeface="Meiryo"/>
               </a:rPr>
-              <a:t>AIが使えない環境では、何もしない実装に落ちる(画面は生成なしで動く)</a:t>
+              <a:t>AIが使えない環境では、何もしない実装になる(画面は生成なしで動く)</a:t>
             </a:r>
           </a:p>
           <a:p>
@@ -12785,7 +12785,7 @@
                 <a:cs typeface="Meiryo"/>
                 <a:ea typeface="Meiryo"/>
               </a:rPr>
-              <a:t>AIは「下書きを作る道具」として位置づけ、最終的な内容の責任はスタッフが持つ形にしています。</a:t>
+              <a:t>AIは下書きを作る道具として位置づけ、最終的な内容の責任はスタッフが持つ形にしています。</a:t>
             </a:r>
           </a:p>
         </p:txBody>
@@ -12900,7 +12900,7 @@
                 <a:cs typeface="Meiryo"/>
                 <a:ea typeface="Meiryo"/>
               </a:rPr>
-              <a:t>   「core が外部SDKを知らない」ことの実証でもある</a:t>
+              <a:t>   core が外部SDKを知らないことの実証でもある</a:t>
             </a:r>
           </a:p>
         </p:txBody>
@@ -13150,7 +13150,7 @@
                 <a:ea typeface="Meiryo"/>
               </a:rPr>
               <a:t>fetch を差し替える
-サーバーへ行かせない</a:t>
+サーバーへは送らない</a:t>
             </a:r>
           </a:p>
         </p:txBody>
@@ -13525,7 +13525,7 @@
                 <a:cs typeface="Meiryo"/>
                 <a:ea typeface="Meiryo"/>
               </a:rPr>
-              <a:t>本番と同じものが動いている</a:t>
+              <a:t>本番と共通の部分</a:t>
             </a:r>
           </a:p>
         </p:txBody>
@@ -13626,7 +13626,7 @@
                 <a:cs typeface="Meiryo"/>
                 <a:ea typeface="Meiryo"/>
               </a:rPr>
-              <a:t>Service Worker ではなく fetch の差し替えにしたのは、GitHub Pages のサブパス配信で適用範囲の問題に悩まされないため</a:t>
+              <a:t>Service Worker ではなく fetch の差し替えにしたのは、GitHub Pages のサブパス配信で適用範囲の問題を避けるため</a:t>
             </a:r>
           </a:p>
         </p:txBody>
@@ -13835,7 +13835,7 @@
                 <a:cs typeface="Meiryo"/>
                 <a:ea typeface="Meiryo"/>
               </a:rPr>
-              <a:t>設定を読むのではなく、出来上がった成果物そのものをCIが検査する</a:t>
+              <a:t>設定ではなく、出来上がった成果物をCIが検査する</a:t>
             </a:r>
             <a:r>
               <a:rPr sz="1050" b="0">
@@ -13898,7 +13898,7 @@
                 <a:cs typeface="Meiryo"/>
                 <a:ea typeface="Meiryo"/>
               </a:rPr>
-              <a:t>デモデータは前回開いた日の翌日から「今日」まで自動で追い足す(何日か空けても履歴が続く)</a:t>
+              <a:t>デモデータは前回開いた日の翌日から当日まで自動で追加する(間隔が空いても履歴が続く)</a:t>
             </a:r>
           </a:p>
         </p:txBody>
@@ -13940,7 +13940,7 @@
                 <a:cs typeface="Meiryo"/>
                 <a:ea typeface="Meiryo"/>
               </a:rPr>
-              <a:t>デモ固有の脆さ(本番には影響しない)</a:t>
+              <a:t>デモ固有の制約(本番には影響しない)</a:t>
             </a:r>
           </a:p>
         </p:txBody>
@@ -13989,7 +13989,7 @@
                 <a:cs typeface="Meiryo"/>
                 <a:ea typeface="Meiryo"/>
               </a:rPr>
-              <a:t>PGlite は1.0未満。書き出しの完了を待つために内部の仕組みを直接呼んでいるため、バージョンを完全固定している</a:t>
+              <a:t>PGlite は1.0未満。書き出しの完了を待つために内部の仕組みを直接呼ぶため、バージョンを固定している</a:t>
             </a:r>
           </a:p>
           <a:p>
@@ -14405,7 +14405,7 @@
                 <a:cs typeface="Meiryo"/>
                 <a:ea typeface="Meiryo"/>
               </a:rPr>
-              <a:t>何をテストしていて、何をしていないか。そして判断いただきたいこと</a:t>
+              <a:t>何をテストしていて、何をしていないか。判断いただきたいこと</a:t>
             </a:r>
           </a:p>
         </p:txBody>
@@ -14871,7 +14871,7 @@
                 <a:cs typeface="Meiryo"/>
                 <a:ea typeface="Meiryo"/>
               </a:rPr>
-              <a:t>  偽の実装を渡し、「失敗すべきときに失敗する」ことを中心に検証(列挙防止・試行上限・割り込み・部分更新なし)</a:t>
+              <a:t>  偽の実装を渡し、失敗すべきときに失敗することを中心に検証(列挙防止・試行上限・割り込み・部分更新なし)</a:t>
             </a:r>
           </a:p>
           <a:p>
@@ -14982,7 +14982,7 @@
                 <a:cs typeface="Meiryo"/>
                 <a:ea typeface="Meiryo"/>
               </a:rPr>
-              <a:t>  CHECK・一意制約・複合外部キーが不正なINSERTを本当に拒否することを、本番と同じマイグレーションを当てたDB上で確認(拒否理由が狙った制約名であることまで見る)</a:t>
+              <a:t>  CHECK・一意制約・複合外部キーが不正なINSERTを拒否することを、本番と同じマイグレーションを当てたDB上で確認(拒否理由が意図した制約名であることまで見る)</a:t>
             </a:r>
           </a:p>
         </p:txBody>
@@ -15498,7 +15498,7 @@
                 <a:cs typeface="Meiryo"/>
                 <a:ea typeface="Meiryo"/>
               </a:rPr>
-              <a:t>新しく足したテストは「直した箇所を元に戻すと落ちること」を1つずつ確認してから残しています。通るだけのテストは、あとから読む人に誤解だけを与えるためです。</a:t>
+              <a:t>新しく足したテストは、直した箇所を元に戻すと落ちることを1つずつ確認してから残しています。通るだけのテストは、後から読む人に誤解を与えます。</a:t>
             </a:r>
           </a:p>
         </p:txBody>
@@ -16499,7 +16499,7 @@
                 <a:cs typeface="Meiryo"/>
                 <a:ea typeface="Meiryo"/>
               </a:rPr>
-              <a:t>   誤解を招きやすい点を先にお伝えします</a:t>
+              <a:t>   誤解を招きやすい点</a:t>
             </a:r>
           </a:p>
         </p:txBody>
@@ -17280,7 +17280,7 @@
                           <a:cs typeface="Meiryo"/>
                           <a:ea typeface="Meiryo"/>
                         </a:rPr>
-                        <a:t>GASブリッジが未デプロイのため一度も動いていない。既定でミラーは無効</a:t>
+                        <a:t>GASブリッジが未デプロイのため動作未確認。既定でミラーは無効</a:t>
                       </a:r>
                     </a:p>
                   </a:txBody>
@@ -17882,7 +17882,7 @@
                 <a:cs typeface="Meiryo"/>
                 <a:ea typeface="Meiryo"/>
               </a:rPr>
-              <a:t>このページがいちばん大事かもしれません</a:t>
+              <a:t>提案書と実装のずれ</a:t>
             </a:r>
           </a:p>
         </p:txBody>
@@ -17924,7 +17924,7 @@
                 <a:cs typeface="Meiryo"/>
                 <a:ea typeface="Meiryo"/>
               </a:rPr>
-              <a:t>提案書だけを読むと、すでに揃っているように見えてしまいます。赤い行は着手すらしていません。ご判断いただきたいのは「この土台の上に、赤を積んでいってよいか」です。土台に構造的な問題があるなら、積む前に直したいと考えています。</a:t>
+              <a:t>提案書だけを読むと、すでに揃っているように見えます。赤い行は未着手です。ご判断いただきたいのは、この土台の上に赤い行を積んでよいかどうかです。土台に構造的な問題があれば、積む前に直します。</a:t>
             </a:r>
           </a:p>
         </p:txBody>
@@ -18028,7 +18028,7 @@
                 <a:cs typeface="Meiryo"/>
                 <a:ea typeface="Meiryo"/>
               </a:rPr>
-              <a:t>この資料の目的と、先に押さえる4語</a:t>
+              <a:t>この資料の目的と、基本の4語</a:t>
             </a:r>
             <a:r>
               <a:rPr sz="1250" b="0" i="0">
@@ -18293,7 +18293,7 @@
                 <a:cs typeface="Meiryo"/>
                 <a:ea typeface="Meiryo"/>
               </a:rPr>
-              <a:t>この資料でお伝えしたいこと</a:t>
+              <a:t>この資料で説明すること</a:t>
             </a:r>
           </a:p>
         </p:txBody>
@@ -18342,7 +18342,7 @@
                 <a:cs typeface="Meiryo"/>
                 <a:ea typeface="Meiryo"/>
               </a:rPr>
-              <a:t>「どこに何が書いてあるか」と「なぜその置き方にしたか」</a:t>
+              <a:t>どこに何が書いてあるか、なぜその置き方にしたか</a:t>
             </a:r>
           </a:p>
           <a:p>
@@ -18656,7 +18656,7 @@
                 <a:cs typeface="Meiryo"/>
                 <a:ea typeface="Meiryo"/>
               </a:rPr>
-              <a:t>先に押さえておきたい4語</a:t>
+              <a:t>本資料で使う4語</a:t>
             </a:r>
           </a:p>
         </p:txBody>
@@ -19034,7 +19034,7 @@
                 <a:cs typeface="Meiryo"/>
                 <a:ea typeface="Meiryo"/>
               </a:rPr>
-              <a:t>「窓口」と「実際に外とつなぐ部品」</a:t>
+              <a:t>窓口と、外とつなぐ部品</a:t>
             </a:r>
           </a:p>
         </p:txBody>
@@ -19112,7 +19112,7 @@
                 <a:cs typeface="Meiryo"/>
                 <a:ea typeface="Meiryo"/>
               </a:rPr>
-              <a:t>業務ロジックは「メールを送る窓口」だけを知る。SendGridなのかGmailなのかは知らない。差し替えとテストがしやすくなる</a:t>
+              <a:t>業務ロジックはメールを送る窓口だけを知り、SendGridかGmailかは知らない。差し替えとテストがしやすくなる</a:t>
             </a:r>
           </a:p>
         </p:txBody>
@@ -19262,7 +19262,7 @@
                 <a:cs typeface="Meiryo"/>
                 <a:ea typeface="Meiryo"/>
               </a:rPr>
-              <a:t>業務ロジックを中心に置き、外側を全部「差し替え可能」にする設計</a:t>
+              <a:t>業務ロジックを中心に置き、外側を差し替え可能にする設計</a:t>
             </a:r>
           </a:p>
         </p:txBody>
@@ -19340,7 +19340,7 @@
                 <a:cs typeface="Meiryo"/>
                 <a:ea typeface="Meiryo"/>
               </a:rPr>
-              <a:t>データベースも外部APIも画面も、すべて中心から見れば「外側」。依存の矢印が中心へ向かって一方通行になる</a:t>
+              <a:t>データベースも外部APIも画面も、中心から見れば外側。依存の矢印は中心へ向かう一方通行になる</a:t>
             </a:r>
           </a:p>
         </p:txBody>
@@ -19490,7 +19490,7 @@
                 <a:cs typeface="Meiryo"/>
                 <a:ea typeface="Meiryo"/>
               </a:rPr>
-              <a:t>「送る予定」をデータベースに書いておき、後で送る方式</a:t>
+              <a:t>送信予定をデータベースに書いておき、後で送る方式</a:t>
             </a:r>
           </a:p>
         </p:txBody>
@@ -19568,7 +19568,7 @@
                 <a:cs typeface="Meiryo"/>
                 <a:ea typeface="Meiryo"/>
               </a:rPr>
-              <a:t>スプレッドシートへの書き戻しに使っている。送信が失敗しても、業務データの保存は確実に完了させられる</a:t>
+              <a:t>スプレッドシートへの書き戻しに使う。送信が失敗しても、業務データの保存は完了できる</a:t>
             </a:r>
           </a:p>
         </p:txBody>
@@ -19700,7 +19700,7 @@
                 <a:cs typeface="Meiryo"/>
                 <a:ea typeface="Meiryo"/>
               </a:rPr>
-              <a:t>この4語だけで、以降の図はだいたい読めます</a:t>
+              <a:t>ポート / アダプタが中心</a:t>
             </a:r>
           </a:p>
         </p:txBody>
@@ -19742,7 +19742,7 @@
                 <a:cs typeface="Meiryo"/>
                 <a:ea typeface="Meiryo"/>
               </a:rPr>
-              <a:t>特に「ポート / アダプタ」は本資料の中心です。この作りにした最大の理由は、同じ業務ロジックを本番(Node.js + PostgreSQL)とブラウザ内デモ(ブラウザ内DB)でそのまま動かせるようにするためでした(P16)。</a:t>
+              <a:t>ポート / アダプタは本資料の中心にある考え方です。この作りにした理由は、同じ業務ロジックを本番(Node.js + PostgreSQL)とブラウザ内デモ(ブラウザ内DB)でそのまま動かせるようにするためです(P16)。</a:t>
             </a:r>
           </a:p>
         </p:txBody>
@@ -19857,7 +19857,7 @@
                 <a:cs typeface="Meiryo"/>
                 <a:ea typeface="Meiryo"/>
               </a:rPr>
-              <a:t>   優先度順。いずれも「直せない」ものではなく「今やるか、いつやるか」</a:t>
+              <a:t>   優先度順。いずれも直せない問題ではなく、実施時期の判断</a:t>
             </a:r>
           </a:p>
         </p:txBody>
@@ -20195,7 +20195,7 @@
                 <a:cs typeface="Meiryo"/>
                 <a:ea typeface="Meiryo"/>
               </a:rPr>
-              <a:t>メール・地図・予定・スプレッドシートの4系統を1つのGAS Web Appに集約。SLAは無く、認証用の文字列がURLに載る。しかもまだ一度もデプロイしていない。</a:t>
+              <a:t>メール・地図・予定・スプレッドシートの4系統を1つのGAS Web Appに集約。SLAは無く、認証用の文字列がURLに載る。まだデプロイしていない。</a:t>
             </a:r>
           </a:p>
         </p:txBody>
@@ -20283,7 +20283,7 @@
                 <a:cs typeface="Meiryo"/>
                 <a:ea typeface="Meiryo"/>
               </a:rPr>
-              <a:t>(a) この依存のまま早期にデプロイして運用設計を詰める / (b) メールだけ別経路に逃がす / (c) スプレッドシート連携を移行対象から外す</a:t>
+              <a:t>(a) この依存のまま早期にデプロイして運用設計を詰める / (b) メールだけ別経路に分ける / (c) スプレッドシート連携を移行対象から外す</a:t>
             </a:r>
           </a:p>
         </p:txBody>
@@ -21549,7 +21549,7 @@
                 <a:cs typeface="Meiryo"/>
                 <a:ea typeface="Meiryo"/>
               </a:rPr>
-              <a:t>私の推奨:メール送信だけ別経路に逃がしたうえで、予約から実装に進めること。ただし意見ですので、ご判断をいただきたいです。</a:t>
+              <a:t>推奨は、メール送信を別経路に分けたうえで予約から実装に進めることです。ご判断をお願いします。</a:t>
             </a:r>
           </a:p>
         </p:txBody>
@@ -21664,7 +21664,7 @@
                 <a:cs typeface="Meiryo"/>
                 <a:ea typeface="Meiryo"/>
               </a:rPr>
-              <a:t>   左は自信を持って言えること、右は判断いただきたいこと</a:t>
+              <a:t>   左は現状できていること、右は判断いただきたいこと</a:t>
             </a:r>
           </a:p>
         </p:txBody>
@@ -21876,7 +21876,7 @@
                 <a:cs typeface="Meiryo"/>
                 <a:ea typeface="Meiryo"/>
               </a:rPr>
-              <a:t>この構成で守れていると考えているもの</a:t>
+              <a:t>この構成でできていること</a:t>
             </a:r>
           </a:p>
         </p:txBody>
@@ -21925,7 +21925,7 @@
                 <a:cs typeface="Meiryo"/>
                 <a:ea typeface="Meiryo"/>
               </a:rPr>
-              <a:t>業務ロジックが外部SDKを一切知らない。結果として、同じコードがNode.jsとブラウザの両方で動く(公開デモで実証)</a:t>
+              <a:t>業務ロジックが外部SDKを知らないため、同じコードがNode.jsとブラウザの両方で動く(公開デモで実証)</a:t>
             </a:r>
           </a:p>
           <a:p>
@@ -21951,7 +21951,7 @@
                 <a:cs typeface="Meiryo"/>
                 <a:ea typeface="Meiryo"/>
               </a:rPr>
-              <a:t>依存の矢印が中心へ向かって一方通行。逆流は1本もない(package.json で確認できる)</a:t>
+              <a:t>依存の矢印は中心へ向かう一方通行。逆方向の依存はない(package.json で確認)</a:t>
             </a:r>
           </a:p>
           <a:p>
@@ -21977,7 +21977,7 @@
                 <a:cs typeface="Meiryo"/>
                 <a:ea typeface="Meiryo"/>
               </a:rPr>
-              <a:t>揃って成立すべき書き込みが、1つのトランザクションで確定する。壊れたらテストが落ちるようにしてある</a:t>
+              <a:t>対で成立すべき書き込みは、1つのトランザクションで確定する。崩れたらテストが落ちる</a:t>
             </a:r>
           </a:p>
           <a:p>
@@ -22029,7 +22029,7 @@
                 <a:cs typeface="Meiryo"/>
                 <a:ea typeface="Meiryo"/>
               </a:rPr>
-              <a:t>認証の失敗経路(列挙・総当たり・割り込み・部分更新・クロスサイト)を数え上げて塞いだ</a:t>
+              <a:t>認証の失敗経路(列挙・総当たり・割り込み・部分更新・クロスサイト)への対策を入れた</a:t>
             </a:r>
           </a:p>
           <a:p>
@@ -22055,7 +22055,7 @@
                 <a:cs typeface="Meiryo"/>
                 <a:ea typeface="Meiryo"/>
               </a:rPr>
-              <a:t>44テーブルすべてで同じスキーマ規約。新しい表を足す手順が決まっている</a:t>
+              <a:t>44テーブルで同じスキーマ規約。新しい表を足す手順が決まっている</a:t>
             </a:r>
           </a:p>
           <a:p>
@@ -22405,7 +22405,7 @@
                 <a:cs typeface="Meiryo"/>
                 <a:ea typeface="Meiryo"/>
               </a:rPr>
-              <a:t>いちばん知りたいこと</a:t>
+              <a:t>特に伺いたい点</a:t>
             </a:r>
             <a:r>
               <a:rPr sz="1100" b="0">
@@ -22416,7 +22416,7 @@
                 <a:cs typeface="Meiryo"/>
                 <a:ea typeface="Meiryo"/>
               </a:rPr>
-              <a:t>:自分では気づきようがない構造的な問題が、他にあるかどうか</a:t>
+              <a:t>:自分では気づけない構造的な問題が、他にあるかどうか</a:t>
             </a:r>
           </a:p>
         </p:txBody>
@@ -23284,7 +23284,7 @@
                 <a:cs typeface="Meiryo"/>
                 <a:ea typeface="Meiryo"/>
               </a:rPr>
-              <a:t>データはすべてスプレッドシート / Drive / カレンダー</a:t>
+              <a:t>データはスプレッドシート / Drive / カレンダーに置く</a:t>
             </a:r>
           </a:p>
           <a:p>
@@ -24040,7 +24040,7 @@
                 <a:cs typeface="Meiryo"/>
                 <a:ea typeface="Meiryo"/>
               </a:rPr>
-              <a:t>いまどこにいるか</a:t>
+              <a:t>実装の現状</a:t>
             </a:r>
           </a:p>
         </p:txBody>
@@ -24388,7 +24388,7 @@
                 <a:cs typeface="Meiryo"/>
                 <a:ea typeface="Meiryo"/>
               </a:rPr>
-              <a:t>スプレッドシートへの書き戻し、メール送信(GASブリッジが未デプロイのため一度も動いていない)</a:t>
+              <a:t>スプレッドシートへの書き戻し、メール送信(GASブリッジが未デプロイのため動作未確認)</a:t>
             </a:r>
           </a:p>
         </p:txBody>
@@ -24778,7 +24778,7 @@
                 <a:cs typeface="Meiryo"/>
                 <a:ea typeface="Meiryo"/>
               </a:rPr>
-              <a:t>「未検証」「未着手」と書いたものは、提案書では実現済みのように読めてしまう部分です。先に区別をお伝えします。</a:t>
+              <a:t>未検証・未着手と書いたものは、提案書では実現済みのように読める部分です。ここで区別しておきます。</a:t>
             </a:r>
           </a:p>
         </p:txBody>
@@ -25606,7 +25606,7 @@
                 <a:cs typeface="Meiryo"/>
                 <a:ea typeface="Meiryo"/>
               </a:rPr>
-              <a:t>まだ一度もデプロイしていない</a:t>
+              <a:t>まだデプロイしていない</a:t>
             </a:r>
           </a:p>
         </p:txBody>
@@ -26378,7 +26378,7 @@
                 <a:cs typeface="Meiryo"/>
                 <a:ea typeface="Meiryo"/>
               </a:rPr>
-              <a:t>この配置で守りたかったこと</a:t>
+              <a:t>この配置の狙い</a:t>
             </a:r>
           </a:p>
         </p:txBody>
@@ -26438,7 +26438,7 @@
                 <a:cs typeface="Meiryo"/>
                 <a:ea typeface="Meiryo"/>
               </a:rPr>
-              <a:t>. スプレッドシートは「写し」であり、止めるときはミラーの部品を外すだけ</a:t>
+              <a:t>. スプレッドシートは写しで、止めるときはミラーの部品を外す</a:t>
             </a:r>
           </a:p>
           <a:p>
@@ -26638,7 +26638,7 @@
                 <a:cs typeface="Meiryo"/>
                 <a:ea typeface="Meiryo"/>
               </a:rPr>
-              <a:t>メール・地図・予定・スプレッドシートの4系統がGASブリッジ1本に集中しています。実行時間制限とクォータがあり、SLAはなく、単一障害点です。しかもまだ一度もデプロイしていません。</a:t>
+              <a:t>メール・地図・予定・スプレッドシートの4系統がGASブリッジ1本に集中しています。実行時間制限とクォータがあり、SLAはなく、単一障害点です。まだデプロイしていません。</a:t>
             </a:r>
           </a:p>
         </p:txBody>
@@ -26726,7 +26726,7 @@
                 <a:cs typeface="Meiryo"/>
                 <a:ea typeface="Meiryo"/>
               </a:rPr>
-              <a:t>読み方:赤い注記は「まだ存在しないもの」。破線は、リクエストの完了を待たずに後から動く処理。オレンジの破線がスプレッドシートへの書き戻し経路です。</a:t>
+              <a:t>赤い注記はまだ存在しないもの。破線はリクエストの完了を待たずに後から動く処理。オレンジの破線がスプレッドシートへの書き戻し経路です。</a:t>
             </a:r>
           </a:p>
         </p:txBody>
@@ -27315,7 +27315,7 @@
                           <a:cs typeface="Meiryo"/>
                           <a:ea typeface="Meiryo"/>
                         </a:rPr>
-                        <a:t>行レベルセキュリティ・排他制約など、必要な制約をDB自身で強制できる</a:t>
+                        <a:t>行レベルセキュリティ・排他制約など、必要な制約をDB側で強制できる</a:t>
                       </a:r>
                     </a:p>
                   </a:txBody>
@@ -28903,7 +28903,7 @@
                 <a:cs typeface="Meiryo"/>
                 <a:ea typeface="Meiryo"/>
               </a:rPr>
-              <a:t>9つの部品と、その間の依存の向き。業務ロジックをどこに閉じ込めたか</a:t>
+              <a:t>9つの部品と、その間の依存の向き。業務ロジックをどこに置いたか</a:t>
             </a:r>
           </a:p>
         </p:txBody>
@@ -29018,7 +29018,7 @@
                 <a:cs typeface="Meiryo"/>
                 <a:ea typeface="Meiryo"/>
               </a:rPr>
-              <a:t>   矢印は「依存する方向」。逆流は1本もない</a:t>
+              <a:t>   矢印は依存の方向。逆方向の依存はない</a:t>
             </a:r>
           </a:p>
         </p:txBody>
@@ -29541,7 +29541,7 @@
                 <a:cs typeface="Meiryo"/>
                 <a:ea typeface="Meiryo"/>
               </a:rPr>
-              <a:t>usecases / domain / ports。外部SDKを一切知らない</a:t>
+              <a:t>usecases / domain / ports。外部SDKを知らない</a:t>
             </a:r>
           </a:p>
         </p:txBody>
@@ -30190,7 +30190,7 @@
                 <a:ea typeface="Meiryo"/>
               </a:rPr>
               <a:t>api / worker / ingestion は
-すべて core に依存する。
+いずれも core に依存する。
 web のコード上の依存は shared
 と(開発時のみ)demo だけ。</a:t>
             </a:r>
@@ -30367,7 +30367,7 @@
                 <a:cs typeface="Meiryo"/>
                 <a:ea typeface="Meiryo"/>
               </a:rPr>
-              <a:t>デモ用コードは本番ビルドに混ざらない:入口を空の実装に差し替え、CIが成果物そのものを検査する。</a:t>
+              <a:t>デモ用コードは本番ビルドに混ざらない。入口を空の実装に差し替え、CIが成果物を検査する。</a:t>
             </a:r>
           </a:p>
         </p:txBody>
@@ -30471,7 +30471,7 @@
                 <a:cs typeface="Meiryo"/>
                 <a:ea typeface="Meiryo"/>
               </a:rPr>
-              <a:t>業務ロジックを中心に閉じ込める</a:t>
+              <a:t>業務ロジックと外側の実装</a:t>
             </a:r>
             <a:r>
               <a:rPr sz="1250" b="0" i="0">
@@ -30886,7 +30886,7 @@
                 <a:cs typeface="Meiryo"/>
                 <a:ea typeface="Meiryo"/>
               </a:rPr>
-              <a:t>ports  外に対する窓口の定義だけ</a:t>
+              <a:t>ports  外に対する窓口の定義</a:t>
             </a:r>
           </a:p>
           <a:p>
@@ -30905,8 +30905,8 @@
                 <a:cs typeface="Meiryo"/>
                 <a:ea typeface="Meiryo"/>
               </a:rPr>
-              <a:t>「保存する」「送る」「暗号化する」という
-形(インターフェース)を33本定義している。
+              <a:t>保存する・送る・暗号化するといった
+形(インターフェース)を33本定義する。
 中身は書かない</a:t>
             </a:r>
           </a:p>
@@ -31850,7 +31850,7 @@
                 <a:ea typeface="Meiryo"/>
               </a:rPr>
               <a:t>実装側:ポートを満たす形で外部とつなぐ。
-core は誰が実装しているか知らない。</a:t>
+core はどの実装かを知らない。</a:t>
             </a:r>
           </a:p>
         </p:txBody>
@@ -31982,7 +31982,7 @@
                 <a:cs typeface="Meiryo"/>
                 <a:ea typeface="Meiryo"/>
               </a:rPr>
-              <a:t>この形にした見返り</a:t>
+              <a:t>この構造の利点</a:t>
             </a:r>
           </a:p>
         </p:txBody>
@@ -32024,7 +32024,7 @@
                 <a:cs typeface="Meiryo"/>
                 <a:ea typeface="Meiryo"/>
               </a:rPr>
-              <a:t>外部サービスが無い環境でも黙って壊れず、何もしない実装に落ちる(地図・予定・AI・ミラー)。そして同じ業務ロジックが、本番でもブラウザ内デモでもそのまま動く。</a:t>
+              <a:t>外部サービスが無い環境では、エラーにせず何もしない実装で動く(地図・予定・AI・ミラー)。同じ業務ロジックが、本番でもブラウザ内デモでもそのまま動く。</a:t>
             </a:r>
           </a:p>
         </p:txBody>
@@ -32156,7 +32156,7 @@
                 <a:cs typeface="Meiryo"/>
                 <a:ea typeface="Meiryo"/>
               </a:rPr>
-              <a:t>正直に申し上げる例外</a:t>
+              <a:t>ポート定義の例外</a:t>
             </a:r>
           </a:p>
         </p:txBody>
@@ -32198,7 +32198,7 @@
                 <a:cs typeface="Meiryo"/>
                 <a:ea typeface="Meiryo"/>
               </a:rPr>
-              <a:t>パスワードのハッシュ化を担う窓口だけ、ports ではなく usecases 側に定義されています。動作に影響はありませんが、置き場所の一貫性は崩れています。</a:t>
+              <a:t>パスワードのハッシュ化の窓口は、ports ではなく usecases 側に定義しています。動作に影響はありませんが、置き場所の一貫性は崩れています。</a:t>
             </a:r>
           </a:p>
         </p:txBody>

--- a/doc/slides/architecture.pptx
+++ b/doc/slides/architecture.pptx
@@ -3753,8 +3753,8 @@
         </p:nvSpPr>
         <p:spPr>
           <a:xfrm>
-            <a:off x="640080" y="1691640"/>
-            <a:ext cx="3291840" cy="3383280"/>
+            <a:off x="640080" y="1664208"/>
+            <a:ext cx="3291840" cy="3429000"/>
           </a:xfrm>
           <a:prstGeom prst="rect">
             <a:avLst/>
@@ -3769,7 +3769,7 @@
           <a:p>
             <a:pPr marL="182880" indent="-182880">
               <a:lnSpc>
-                <a:spcPct val="120000"/>
+                <a:spcPct val="105000"/>
               </a:lnSpc>
               <a:spcBef>
                 <a:spcPts val="0"/>
@@ -3781,7 +3781,7 @@
               <a:buChar char="▪"/>
             </a:pPr>
             <a:r>
-              <a:rPr sz="1050" b="0">
+              <a:rPr sz="950" b="0">
                 <a:solidFill>
                   <a:srgbClr val="14223A"/>
                 </a:solidFill>
@@ -3795,10 +3795,10 @@
           <a:p>
             <a:pPr marL="182880" indent="-182880">
               <a:lnSpc>
-                <a:spcPct val="120000"/>
+                <a:spcPct val="105000"/>
               </a:lnSpc>
               <a:spcBef>
-                <a:spcPts val="350"/>
+                <a:spcPts val="150"/>
               </a:spcBef>
               <a:buClr>
                 <a:srgbClr val="0369A1"/>
@@ -3807,7 +3807,7 @@
               <a:buChar char="▪"/>
             </a:pPr>
             <a:r>
-              <a:rPr sz="1050" b="0">
+              <a:rPr sz="950" b="0">
                 <a:solidFill>
                   <a:srgbClr val="14223A"/>
                 </a:solidFill>
@@ -3821,10 +3821,10 @@
           <a:p>
             <a:pPr marL="182880" indent="-182880">
               <a:lnSpc>
-                <a:spcPct val="120000"/>
+                <a:spcPct val="105000"/>
               </a:lnSpc>
               <a:spcBef>
-                <a:spcPts val="350"/>
+                <a:spcPts val="150"/>
               </a:spcBef>
               <a:buClr>
                 <a:srgbClr val="0369A1"/>
@@ -3833,7 +3833,7 @@
               <a:buChar char="▪"/>
             </a:pPr>
             <a:r>
-              <a:rPr sz="1050" b="0">
+              <a:rPr sz="950" b="0">
                 <a:solidFill>
                   <a:srgbClr val="14223A"/>
                 </a:solidFill>
@@ -3847,10 +3847,10 @@
           <a:p>
             <a:pPr marL="182880" indent="-182880">
               <a:lnSpc>
-                <a:spcPct val="120000"/>
+                <a:spcPct val="105000"/>
               </a:lnSpc>
               <a:spcBef>
-                <a:spcPts val="350"/>
+                <a:spcPts val="150"/>
               </a:spcBef>
               <a:buClr>
                 <a:srgbClr val="0369A1"/>
@@ -3859,7 +3859,7 @@
               <a:buChar char="▪"/>
             </a:pPr>
             <a:r>
-              <a:rPr sz="1050" b="0">
+              <a:rPr sz="950" b="0">
                 <a:solidFill>
                   <a:srgbClr val="14223A"/>
                 </a:solidFill>
@@ -3873,10 +3873,10 @@
           <a:p>
             <a:pPr marL="182880" indent="-182880">
               <a:lnSpc>
-                <a:spcPct val="120000"/>
+                <a:spcPct val="105000"/>
               </a:lnSpc>
               <a:spcBef>
-                <a:spcPts val="350"/>
+                <a:spcPts val="150"/>
               </a:spcBef>
               <a:buClr>
                 <a:srgbClr val="0369A1"/>
@@ -3885,7 +3885,7 @@
               <a:buChar char="▪"/>
             </a:pPr>
             <a:r>
-              <a:rPr sz="1050" b="0">
+              <a:rPr sz="950" b="0">
                 <a:solidFill>
                   <a:srgbClr val="14223A"/>
                 </a:solidFill>
@@ -3899,10 +3899,10 @@
           <a:p>
             <a:pPr marL="182880" indent="-182880">
               <a:lnSpc>
-                <a:spcPct val="120000"/>
+                <a:spcPct val="105000"/>
               </a:lnSpc>
               <a:spcBef>
-                <a:spcPts val="350"/>
+                <a:spcPts val="150"/>
               </a:spcBef>
               <a:buClr>
                 <a:srgbClr val="0369A1"/>
@@ -3911,7 +3911,7 @@
               <a:buChar char="▪"/>
             </a:pPr>
             <a:r>
-              <a:rPr sz="1050" b="0">
+              <a:rPr sz="950" b="0">
                 <a:solidFill>
                   <a:srgbClr val="14223A"/>
                 </a:solidFill>
@@ -3925,10 +3925,10 @@
           <a:p>
             <a:pPr marL="182880" indent="-182880">
               <a:lnSpc>
-                <a:spcPct val="120000"/>
+                <a:spcPct val="105000"/>
               </a:lnSpc>
               <a:spcBef>
-                <a:spcPts val="350"/>
+                <a:spcPts val="150"/>
               </a:spcBef>
               <a:buClr>
                 <a:srgbClr val="0369A1"/>
@@ -3937,7 +3937,7 @@
               <a:buChar char="▪"/>
             </a:pPr>
             <a:r>
-              <a:rPr sz="1050" b="0">
+              <a:rPr sz="950" b="0">
                 <a:solidFill>
                   <a:srgbClr val="14223A"/>
                 </a:solidFill>
@@ -3951,10 +3951,10 @@
           <a:p>
             <a:pPr marL="182880" indent="-182880">
               <a:lnSpc>
-                <a:spcPct val="120000"/>
+                <a:spcPct val="105000"/>
               </a:lnSpc>
               <a:spcBef>
-                <a:spcPts val="350"/>
+                <a:spcPts val="150"/>
               </a:spcBef>
               <a:buClr>
                 <a:srgbClr val="0369A1"/>
@@ -3963,7 +3963,7 @@
               <a:buChar char="▪"/>
             </a:pPr>
             <a:r>
-              <a:rPr sz="1050" b="0">
+              <a:rPr sz="950" b="0">
                 <a:solidFill>
                   <a:srgbClr val="14223A"/>
                 </a:solidFill>
@@ -3977,10 +3977,10 @@
           <a:p>
             <a:pPr marL="182880" indent="-182880">
               <a:lnSpc>
-                <a:spcPct val="120000"/>
+                <a:spcPct val="105000"/>
               </a:lnSpc>
               <a:spcBef>
-                <a:spcPts val="350"/>
+                <a:spcPts val="150"/>
               </a:spcBef>
               <a:buClr>
                 <a:srgbClr val="0369A1"/>
@@ -3989,7 +3989,7 @@
               <a:buChar char="▪"/>
             </a:pPr>
             <a:r>
-              <a:rPr sz="1050" b="0">
+              <a:rPr sz="950" b="0">
                 <a:solidFill>
                   <a:srgbClr val="14223A"/>
                 </a:solidFill>
@@ -4003,10 +4003,10 @@
           <a:p>
             <a:pPr marL="182880" indent="-182880">
               <a:lnSpc>
-                <a:spcPct val="120000"/>
+                <a:spcPct val="105000"/>
               </a:lnSpc>
               <a:spcBef>
-                <a:spcPts val="350"/>
+                <a:spcPts val="150"/>
               </a:spcBef>
               <a:buClr>
                 <a:srgbClr val="0369A1"/>
@@ -4015,7 +4015,7 @@
               <a:buChar char="▪"/>
             </a:pPr>
             <a:r>
-              <a:rPr sz="1050" b="0">
+              <a:rPr sz="950" b="0">
                 <a:solidFill>
                   <a:srgbClr val="14223A"/>
                 </a:solidFill>
@@ -4029,10 +4029,10 @@
           <a:p>
             <a:pPr marL="182880" indent="-182880">
               <a:lnSpc>
-                <a:spcPct val="120000"/>
+                <a:spcPct val="105000"/>
               </a:lnSpc>
               <a:spcBef>
-                <a:spcPts val="350"/>
+                <a:spcPts val="150"/>
               </a:spcBef>
               <a:buClr>
                 <a:srgbClr val="0369A1"/>
@@ -4041,7 +4041,7 @@
               <a:buChar char="▪"/>
             </a:pPr>
             <a:r>
-              <a:rPr sz="1050" b="0">
+              <a:rPr sz="950" b="0">
                 <a:solidFill>
                   <a:srgbClr val="14223A"/>
                 </a:solidFill>
@@ -4055,10 +4055,10 @@
           <a:p>
             <a:pPr marL="182880" indent="-182880">
               <a:lnSpc>
-                <a:spcPct val="120000"/>
+                <a:spcPct val="105000"/>
               </a:lnSpc>
               <a:spcBef>
-                <a:spcPts val="350"/>
+                <a:spcPts val="150"/>
               </a:spcBef>
               <a:buClr>
                 <a:srgbClr val="0369A1"/>
@@ -4067,7 +4067,7 @@
               <a:buChar char="▪"/>
             </a:pPr>
             <a:r>
-              <a:rPr sz="1050" b="0">
+              <a:rPr sz="950" b="0">
                 <a:solidFill>
                   <a:srgbClr val="14223A"/>
                 </a:solidFill>
@@ -4081,10 +4081,10 @@
           <a:p>
             <a:pPr marL="182880" indent="-182880">
               <a:lnSpc>
-                <a:spcPct val="120000"/>
+                <a:spcPct val="105000"/>
               </a:lnSpc>
               <a:spcBef>
-                <a:spcPts val="350"/>
+                <a:spcPts val="150"/>
               </a:spcBef>
               <a:buClr>
                 <a:srgbClr val="0369A1"/>
@@ -4093,7 +4093,7 @@
               <a:buChar char="▪"/>
             </a:pPr>
             <a:r>
-              <a:rPr sz="1050" b="0">
+              <a:rPr sz="950" b="0">
                 <a:solidFill>
                   <a:srgbClr val="14223A"/>
                 </a:solidFill>
@@ -4107,10 +4107,10 @@
           <a:p>
             <a:pPr marL="182880" indent="-182880">
               <a:lnSpc>
-                <a:spcPct val="120000"/>
+                <a:spcPct val="105000"/>
               </a:lnSpc>
               <a:spcBef>
-                <a:spcPts val="350"/>
+                <a:spcPts val="150"/>
               </a:spcBef>
               <a:buClr>
                 <a:srgbClr val="0369A1"/>
@@ -4119,7 +4119,7 @@
               <a:buChar char="▪"/>
             </a:pPr>
             <a:r>
-              <a:rPr sz="1050" b="0">
+              <a:rPr sz="950" b="0">
                 <a:solidFill>
                   <a:srgbClr val="14223A"/>
                 </a:solidFill>
@@ -4133,10 +4133,10 @@
           <a:p>
             <a:pPr marL="182880" indent="-182880">
               <a:lnSpc>
-                <a:spcPct val="120000"/>
+                <a:spcPct val="105000"/>
               </a:lnSpc>
               <a:spcBef>
-                <a:spcPts val="350"/>
+                <a:spcPts val="150"/>
               </a:spcBef>
               <a:buClr>
                 <a:srgbClr val="0369A1"/>
@@ -4145,7 +4145,7 @@
               <a:buChar char="▪"/>
             </a:pPr>
             <a:r>
-              <a:rPr sz="1050" b="0">
+              <a:rPr sz="950" b="0">
                 <a:solidFill>
                   <a:srgbClr val="14223A"/>
                 </a:solidFill>
@@ -4159,10 +4159,10 @@
           <a:p>
             <a:pPr marL="182880" indent="-182880">
               <a:lnSpc>
-                <a:spcPct val="120000"/>
+                <a:spcPct val="105000"/>
               </a:lnSpc>
               <a:spcBef>
-                <a:spcPts val="350"/>
+                <a:spcPts val="150"/>
               </a:spcBef>
               <a:buClr>
                 <a:srgbClr val="0369A1"/>
@@ -4171,7 +4171,7 @@
               <a:buChar char="▪"/>
             </a:pPr>
             <a:r>
-              <a:rPr sz="1050" b="0">
+              <a:rPr sz="950" b="0">
                 <a:solidFill>
                   <a:srgbClr val="14223A"/>
                 </a:solidFill>
@@ -4185,10 +4185,10 @@
           <a:p>
             <a:pPr marL="182880" indent="-182880">
               <a:lnSpc>
-                <a:spcPct val="120000"/>
+                <a:spcPct val="105000"/>
               </a:lnSpc>
               <a:spcBef>
-                <a:spcPts val="350"/>
+                <a:spcPts val="150"/>
               </a:spcBef>
               <a:buClr>
                 <a:srgbClr val="0369A1"/>
@@ -4197,7 +4197,7 @@
               <a:buChar char="▪"/>
             </a:pPr>
             <a:r>
-              <a:rPr sz="1050" b="0">
+              <a:rPr sz="950" b="0">
                 <a:solidFill>
                   <a:srgbClr val="14223A"/>
                 </a:solidFill>
@@ -4211,10 +4211,10 @@
           <a:p>
             <a:pPr marL="182880" indent="-182880">
               <a:lnSpc>
-                <a:spcPct val="120000"/>
+                <a:spcPct val="105000"/>
               </a:lnSpc>
               <a:spcBef>
-                <a:spcPts val="350"/>
+                <a:spcPts val="150"/>
               </a:spcBef>
               <a:buClr>
                 <a:srgbClr val="0369A1"/>
@@ -4223,7 +4223,7 @@
               <a:buChar char="▪"/>
             </a:pPr>
             <a:r>
-              <a:rPr sz="1050" b="0">
+              <a:rPr sz="950" b="0">
                 <a:solidFill>
                   <a:srgbClr val="14223A"/>
                 </a:solidFill>
@@ -4237,10 +4237,10 @@
           <a:p>
             <a:pPr marL="182880" indent="-182880">
               <a:lnSpc>
-                <a:spcPct val="120000"/>
+                <a:spcPct val="105000"/>
               </a:lnSpc>
               <a:spcBef>
-                <a:spcPts val="350"/>
+                <a:spcPts val="150"/>
               </a:spcBef>
               <a:buClr>
                 <a:srgbClr val="0369A1"/>
@@ -4249,7 +4249,7 @@
               <a:buChar char="▪"/>
             </a:pPr>
             <a:r>
-              <a:rPr sz="1050" b="0">
+              <a:rPr sz="950" b="0">
                 <a:solidFill>
                   <a:srgbClr val="14223A"/>
                 </a:solidFill>
@@ -4378,8 +4378,8 @@
         </p:nvSpPr>
         <p:spPr>
           <a:xfrm>
-            <a:off x="4425696" y="1691640"/>
-            <a:ext cx="3337560" cy="3383280"/>
+            <a:off x="4425696" y="1664208"/>
+            <a:ext cx="3337560" cy="3429000"/>
           </a:xfrm>
           <a:prstGeom prst="rect">
             <a:avLst/>
@@ -4394,7 +4394,7 @@
           <a:p>
             <a:pPr marL="182880" indent="-182880">
               <a:lnSpc>
-                <a:spcPct val="120000"/>
+                <a:spcPct val="105000"/>
               </a:lnSpc>
               <a:spcBef>
                 <a:spcPts val="0"/>
@@ -4406,7 +4406,7 @@
               <a:buChar char="▪"/>
             </a:pPr>
             <a:r>
-              <a:rPr sz="1050" b="0">
+              <a:rPr sz="950" b="0">
                 <a:solidFill>
                   <a:srgbClr val="14223A"/>
                 </a:solidFill>
@@ -4420,10 +4420,10 @@
           <a:p>
             <a:pPr marL="182880" indent="-182880">
               <a:lnSpc>
-                <a:spcPct val="120000"/>
+                <a:spcPct val="105000"/>
               </a:lnSpc>
               <a:spcBef>
-                <a:spcPts val="350"/>
+                <a:spcPts val="150"/>
               </a:spcBef>
               <a:buClr>
                 <a:srgbClr val="6D28D9"/>
@@ -4432,7 +4432,7 @@
               <a:buChar char="▪"/>
             </a:pPr>
             <a:r>
-              <a:rPr sz="1050" b="0">
+              <a:rPr sz="950" b="0">
                 <a:solidFill>
                   <a:srgbClr val="14223A"/>
                 </a:solidFill>
@@ -4446,10 +4446,10 @@
           <a:p>
             <a:pPr marL="182880" indent="-182880">
               <a:lnSpc>
-                <a:spcPct val="120000"/>
+                <a:spcPct val="105000"/>
               </a:lnSpc>
               <a:spcBef>
-                <a:spcPts val="350"/>
+                <a:spcPts val="150"/>
               </a:spcBef>
               <a:buClr>
                 <a:srgbClr val="6D28D9"/>
@@ -4458,7 +4458,7 @@
               <a:buChar char="▪"/>
             </a:pPr>
             <a:r>
-              <a:rPr sz="1050" b="0">
+              <a:rPr sz="950" b="0">
                 <a:solidFill>
                   <a:srgbClr val="14223A"/>
                 </a:solidFill>
@@ -4472,10 +4472,10 @@
           <a:p>
             <a:pPr marL="182880" indent="-182880">
               <a:lnSpc>
-                <a:spcPct val="120000"/>
+                <a:spcPct val="105000"/>
               </a:lnSpc>
               <a:spcBef>
-                <a:spcPts val="350"/>
+                <a:spcPts val="150"/>
               </a:spcBef>
               <a:buClr>
                 <a:srgbClr val="6D28D9"/>
@@ -4484,7 +4484,7 @@
               <a:buChar char="▪"/>
             </a:pPr>
             <a:r>
-              <a:rPr sz="1050" b="0">
+              <a:rPr sz="950" b="0">
                 <a:solidFill>
                   <a:srgbClr val="14223A"/>
                 </a:solidFill>
@@ -4498,10 +4498,10 @@
           <a:p>
             <a:pPr marL="182880" indent="-182880">
               <a:lnSpc>
-                <a:spcPct val="120000"/>
+                <a:spcPct val="105000"/>
               </a:lnSpc>
               <a:spcBef>
-                <a:spcPts val="350"/>
+                <a:spcPts val="150"/>
               </a:spcBef>
               <a:buClr>
                 <a:srgbClr val="6D28D9"/>
@@ -4510,7 +4510,7 @@
               <a:buChar char="▪"/>
             </a:pPr>
             <a:r>
-              <a:rPr sz="1050" b="0">
+              <a:rPr sz="950" b="0">
                 <a:solidFill>
                   <a:srgbClr val="14223A"/>
                 </a:solidFill>
@@ -4524,10 +4524,10 @@
           <a:p>
             <a:pPr marL="182880" indent="-182880">
               <a:lnSpc>
-                <a:spcPct val="120000"/>
+                <a:spcPct val="105000"/>
               </a:lnSpc>
               <a:spcBef>
-                <a:spcPts val="350"/>
+                <a:spcPts val="150"/>
               </a:spcBef>
               <a:buClr>
                 <a:srgbClr val="6D28D9"/>
@@ -4536,7 +4536,7 @@
               <a:buChar char="▪"/>
             </a:pPr>
             <a:r>
-              <a:rPr sz="1050" b="0">
+              <a:rPr sz="950" b="0">
                 <a:solidFill>
                   <a:srgbClr val="14223A"/>
                 </a:solidFill>
@@ -4550,10 +4550,10 @@
           <a:p>
             <a:pPr marL="182880" indent="-182880">
               <a:lnSpc>
-                <a:spcPct val="120000"/>
+                <a:spcPct val="105000"/>
               </a:lnSpc>
               <a:spcBef>
-                <a:spcPts val="350"/>
+                <a:spcPts val="150"/>
               </a:spcBef>
               <a:buClr>
                 <a:srgbClr val="6D28D9"/>
@@ -4562,7 +4562,7 @@
               <a:buChar char="▪"/>
             </a:pPr>
             <a:r>
-              <a:rPr sz="1050" b="0">
+              <a:rPr sz="950" b="0">
                 <a:solidFill>
                   <a:srgbClr val="14223A"/>
                 </a:solidFill>
@@ -4576,10 +4576,10 @@
           <a:p>
             <a:pPr marL="182880" indent="-182880">
               <a:lnSpc>
-                <a:spcPct val="120000"/>
+                <a:spcPct val="105000"/>
               </a:lnSpc>
               <a:spcBef>
-                <a:spcPts val="350"/>
+                <a:spcPts val="150"/>
               </a:spcBef>
               <a:buClr>
                 <a:srgbClr val="6D28D9"/>
@@ -4588,7 +4588,7 @@
               <a:buChar char="▪"/>
             </a:pPr>
             <a:r>
-              <a:rPr sz="1050" b="0">
+              <a:rPr sz="950" b="0">
                 <a:solidFill>
                   <a:srgbClr val="14223A"/>
                 </a:solidFill>
@@ -4602,10 +4602,10 @@
           <a:p>
             <a:pPr marL="182880" indent="-182880">
               <a:lnSpc>
-                <a:spcPct val="120000"/>
+                <a:spcPct val="105000"/>
               </a:lnSpc>
               <a:spcBef>
-                <a:spcPts val="350"/>
+                <a:spcPts val="150"/>
               </a:spcBef>
               <a:buClr>
                 <a:srgbClr val="6D28D9"/>
@@ -4614,7 +4614,7 @@
               <a:buChar char="▪"/>
             </a:pPr>
             <a:r>
-              <a:rPr sz="1050" b="0">
+              <a:rPr sz="950" b="0">
                 <a:solidFill>
                   <a:srgbClr val="14223A"/>
                 </a:solidFill>
@@ -4743,8 +4743,8 @@
         </p:nvSpPr>
         <p:spPr>
           <a:xfrm>
-            <a:off x="8257031" y="1691640"/>
-            <a:ext cx="3337560" cy="3383280"/>
+            <a:off x="8257031" y="1664208"/>
+            <a:ext cx="3337560" cy="3429000"/>
           </a:xfrm>
           <a:prstGeom prst="rect">
             <a:avLst/>
@@ -4759,7 +4759,7 @@
           <a:p>
             <a:pPr marL="182880" indent="-182880">
               <a:lnSpc>
-                <a:spcPct val="120000"/>
+                <a:spcPct val="105000"/>
               </a:lnSpc>
               <a:spcBef>
                 <a:spcPts val="0"/>
@@ -4771,7 +4771,7 @@
               <a:buChar char="▪"/>
             </a:pPr>
             <a:r>
-              <a:rPr sz="1050" b="0">
+              <a:rPr sz="950" b="0">
                 <a:solidFill>
                   <a:srgbClr val="14223A"/>
                 </a:solidFill>
@@ -4785,10 +4785,10 @@
           <a:p>
             <a:pPr marL="182880" indent="-182880">
               <a:lnSpc>
-                <a:spcPct val="120000"/>
+                <a:spcPct val="105000"/>
               </a:lnSpc>
               <a:spcBef>
-                <a:spcPts val="350"/>
+                <a:spcPts val="150"/>
               </a:spcBef>
               <a:buClr>
                 <a:srgbClr val="047857"/>
@@ -4797,7 +4797,7 @@
               <a:buChar char="▪"/>
             </a:pPr>
             <a:r>
-              <a:rPr sz="1050" b="0">
+              <a:rPr sz="950" b="0">
                 <a:solidFill>
                   <a:srgbClr val="14223A"/>
                 </a:solidFill>
@@ -4811,10 +4811,10 @@
           <a:p>
             <a:pPr marL="182880" indent="-182880">
               <a:lnSpc>
-                <a:spcPct val="120000"/>
+                <a:spcPct val="105000"/>
               </a:lnSpc>
               <a:spcBef>
-                <a:spcPts val="350"/>
+                <a:spcPts val="150"/>
               </a:spcBef>
               <a:buClr>
                 <a:srgbClr val="047857"/>
@@ -4823,7 +4823,7 @@
               <a:buChar char="▪"/>
             </a:pPr>
             <a:r>
-              <a:rPr sz="1050" b="0">
+              <a:rPr sz="950" b="0">
                 <a:solidFill>
                   <a:srgbClr val="14223A"/>
                 </a:solidFill>
@@ -4837,10 +4837,10 @@
           <a:p>
             <a:pPr marL="182880" indent="-182880">
               <a:lnSpc>
-                <a:spcPct val="120000"/>
+                <a:spcPct val="105000"/>
               </a:lnSpc>
               <a:spcBef>
-                <a:spcPts val="350"/>
+                <a:spcPts val="150"/>
               </a:spcBef>
               <a:buClr>
                 <a:srgbClr val="047857"/>
@@ -4849,7 +4849,7 @@
               <a:buChar char="▪"/>
             </a:pPr>
             <a:r>
-              <a:rPr sz="1050" b="0">
+              <a:rPr sz="950" b="0">
                 <a:solidFill>
                   <a:srgbClr val="14223A"/>
                 </a:solidFill>
@@ -4863,10 +4863,10 @@
           <a:p>
             <a:pPr marL="182880" indent="-182880">
               <a:lnSpc>
-                <a:spcPct val="120000"/>
+                <a:spcPct val="105000"/>
               </a:lnSpc>
               <a:spcBef>
-                <a:spcPts val="350"/>
+                <a:spcPts val="150"/>
               </a:spcBef>
               <a:buClr>
                 <a:srgbClr val="047857"/>
@@ -4875,7 +4875,7 @@
               <a:buChar char="▪"/>
             </a:pPr>
             <a:r>
-              <a:rPr sz="1050" b="0">
+              <a:rPr sz="950" b="0">
                 <a:solidFill>
                   <a:srgbClr val="14223A"/>
                 </a:solidFill>
@@ -5739,7 +5739,7 @@
                 <a:cs typeface="Meiryo"/>
                 <a:ea typeface="Meiryo"/>
               </a:rPr>
-              <a:t>Cookie照合 → 権限確認 → Origin照合 → 入力検証</a:t>
+              <a:t>Cookie・権限・Origin・入力を検査</a:t>
             </a:r>
           </a:p>
         </p:txBody>
@@ -7845,7 +7845,7 @@
                 <a:cs typeface="Meiryo"/>
                 <a:ea typeface="Meiryo"/>
               </a:rPr>
-              <a:t>新規のGoogle API連携より、既存のGASブリッジを優先した。①新規の課金・認証情報の準備を避ける ②GAS側で実証済みのロジック(イベント分類・タグ解析・スタッフ名の照合)を再実装しない</a:t>
+              <a:t>既存のGASブリッジを優先。①新規の課金・認証情報を避ける ②実証済みのロジック(イベント分類・タグ解析・氏名照合)を再実装しない</a:t>
             </a:r>
           </a:p>
           <a:p>
@@ -7871,7 +7871,7 @@
                 <a:cs typeface="Meiryo"/>
                 <a:ea typeface="Meiryo"/>
               </a:rPr>
-              <a:t>スプレッドシートを止めるときは、ミラーのアダプタを外すだけで済む(業務ロジックは無変更)</a:t>
+              <a:t>スプレッドシートを止めるときは、ミラーのアダプタを外す(業務ロジックは無変更)</a:t>
             </a:r>
           </a:p>
           <a:p>
@@ -7897,7 +7897,7 @@
                 <a:cs typeface="Meiryo"/>
                 <a:ea typeface="Meiryo"/>
               </a:rPr>
-              <a:t>多重に動かしても安全(SKIP LOCKED)。処理中のまま5分放置された行は再取得の対象になる</a:t>
+              <a:t>多重起動しても安全(SKIP LOCKED)。処理中のまま5分経った行は再取得される</a:t>
             </a:r>
           </a:p>
         </p:txBody>
@@ -8696,7 +8696,7 @@
                 <a:cs typeface="Meiryo"/>
                 <a:ea typeface="Meiryo"/>
               </a:rPr>
-              <a:t>GASはカスタムヘッダーを読めないため、認証用の文字列をURLのクエリに付ける。実行ログやプロキシに残る。交換手順は未整備</a:t>
+              <a:t>GASはヘッダーを読めないため、認証用の文字列をURLクエリに付ける。ログに残り、交換手順も未整備</a:t>
             </a:r>
           </a:p>
         </p:txBody>
@@ -10656,7 +10656,7 @@
                 <a:cs typeface="Meiryo"/>
                 <a:ea typeface="Meiryo"/>
               </a:rPr>
-              <a:t>ログインの成否・パスワード変更・管理者操作を、実行者と対象付きでログに残す</a:t>
+              <a:t>ログイン成否・パスワード変更・管理者操作を、実行者と対象付きで記録</a:t>
             </a:r>
           </a:p>
         </p:txBody>
@@ -13898,7 +13898,7 @@
                 <a:cs typeface="Meiryo"/>
                 <a:ea typeface="Meiryo"/>
               </a:rPr>
-              <a:t>デモデータは前回開いた日の翌日から当日まで自動で追加する(間隔が空いても履歴が続く)</a:t>
+              <a:t>デモデータは前回開いた翌日から当日まで自動で追加(履歴が途切れない)</a:t>
             </a:r>
           </a:p>
         </p:txBody>
@@ -14834,7 +14834,7 @@
                 <a:cs typeface="Meiryo"/>
                 <a:ea typeface="Meiryo"/>
               </a:rPr>
-              <a:t>  勤怠計算は、GAS版をNodeで実行した結果を正解として合成データ19ケース+月次集計で完全一致。CSV解析は実サンプル398行で一致</a:t>
+              <a:t>  勤怠計算はGAS版をNodeで実行した結果と、合成データ19ケース+月次集計で完全一致。CSV解析は実サンプル398行で一致</a:t>
             </a:r>
           </a:p>
           <a:p>
@@ -14945,7 +14945,7 @@
                 <a:cs typeface="Meiryo"/>
                 <a:ea typeface="Meiryo"/>
               </a:rPr>
-              <a:t>  全テーブル分の静的検査と、権限を落としたロールでの実挙動の両方</a:t>
+              <a:t>  全テーブルの静的検査と、権限を落としたロールでの実挙動</a:t>
             </a:r>
           </a:p>
           <a:p>
@@ -14982,7 +14982,7 @@
                 <a:cs typeface="Meiryo"/>
                 <a:ea typeface="Meiryo"/>
               </a:rPr>
-              <a:t>  CHECK・一意制約・複合外部キーが不正なINSERTを拒否することを、本番と同じマイグレーションを当てたDB上で確認(拒否理由が意図した制約名であることまで見る)</a:t>
+              <a:t>  CHECK・一意制約・複合外部キーが不正なINSERTを拒否することを、本番と同じマイグレーションを当てたDBで確認(制約名まで照合)</a:t>
             </a:r>
           </a:p>
         </p:txBody>
@@ -23284,7 +23284,7 @@
                 <a:cs typeface="Meiryo"/>
                 <a:ea typeface="Meiryo"/>
               </a:rPr>
-              <a:t>データはスプレッドシート / Drive / カレンダーに置く</a:t>
+              <a:t>データはスプレッドシート / Drive / カレンダー</a:t>
             </a:r>
           </a:p>
           <a:p>
@@ -23347,7 +23347,7 @@
                 <a:cs typeface="Meiryo"/>
                 <a:ea typeface="Meiryo"/>
               </a:rPr>
-              <a:t>認証は共有ソルトのSHA-256。セッショントークンをシートに直書き</a:t>
+              <a:t>認証は共有ソルトのSHA-256。トークンはシートに直書き</a:t>
             </a:r>
           </a:p>
           <a:p>
@@ -23373,7 +23373,7 @@
                 <a:cs typeface="Meiryo"/>
                 <a:ea typeface="Meiryo"/>
               </a:rPr>
-              <a:t>顧客CSVの取り込みが全置換(欠損時に丸ごと消えるリスク)</a:t>
+              <a:t>顧客CSVの取込は全置換(欠損時に丸ごと消える)</a:t>
             </a:r>
           </a:p>
           <a:p>
@@ -23399,7 +23399,7 @@
                 <a:cs typeface="Meiryo"/>
                 <a:ea typeface="Meiryo"/>
               </a:rPr>
-              <a:t>現場で本番稼働中。機能追加は凍結し、不具合修正のみ</a:t>
+              <a:t>本番稼働中。機能追加は凍結し不具合修正のみ</a:t>
             </a:r>
           </a:p>
         </p:txBody>
@@ -23593,7 +23593,7 @@
                 <a:cs typeface="Meiryo"/>
                 <a:ea typeface="Meiryo"/>
               </a:rPr>
-              <a:t>。複数法人を1つの基盤に収容する</a:t>
+              <a:t>。複数法人を1基盤に収容</a:t>
             </a:r>
           </a:p>
           <a:p>
@@ -23630,7 +23630,7 @@
                 <a:cs typeface="Meiryo"/>
                 <a:ea typeface="Meiryo"/>
               </a:rPr>
-              <a:t>にし、スプレッドシートは互換維持のための「写し」として残す</a:t>
+              <a:t>にし、スプレッドシートは互換用の写しとして残す</a:t>
             </a:r>
           </a:p>
           <a:p>
@@ -23656,7 +23656,7 @@
                 <a:cs typeface="Meiryo"/>
                 <a:ea typeface="Meiryo"/>
               </a:rPr>
-              <a:t>将来の訪問看護事業への展開(カルテ・保存年限の管理)</a:t>
+              <a:t>将来は訪問看護事業へ展開(カルテ・保存年限)</a:t>
             </a:r>
           </a:p>
           <a:p>
@@ -23682,7 +23682,7 @@
                 <a:cs typeface="Meiryo"/>
                 <a:ea typeface="Meiryo"/>
               </a:rPr>
-              <a:t>一斉切り替えを避ける</a:t>
+              <a:t>一斉切り替えを避け</a:t>
             </a:r>
             <a:r>
               <a:rPr sz="1050" b="0">
@@ -23693,7 +23693,7 @@
                 <a:cs typeface="Meiryo"/>
                 <a:ea typeface="Meiryo"/>
               </a:rPr>
-              <a:t>:GAS版と併存しながら段階的に移す</a:t>
+              <a:t>、GAS版と併存しながら段階的に移す</a:t>
             </a:r>
           </a:p>
         </p:txBody>
@@ -26258,7 +26258,7 @@
         <p:spPr>
           <a:xfrm>
             <a:off x="457200" y="4434840"/>
-            <a:ext cx="5486400" cy="1234440"/>
+            <a:ext cx="5486400" cy="1371600"/>
           </a:xfrm>
           <a:prstGeom prst="roundRect">
             <a:avLst>
@@ -26306,7 +26306,7 @@
         <p:spPr>
           <a:xfrm>
             <a:off x="457200" y="4434840"/>
-            <a:ext cx="68580" cy="1234440"/>
+            <a:ext cx="68580" cy="1371600"/>
           </a:xfrm>
           <a:prstGeom prst="rect">
             <a:avLst/>
@@ -26392,7 +26392,7 @@
         <p:spPr>
           <a:xfrm>
             <a:off x="667512" y="4846320"/>
-            <a:ext cx="5111496" cy="731519"/>
+            <a:ext cx="5111496" cy="868679"/>
           </a:xfrm>
           <a:prstGeom prst="rect">
             <a:avLst/>
@@ -26438,7 +26438,7 @@
                 <a:cs typeface="Meiryo"/>
                 <a:ea typeface="Meiryo"/>
               </a:rPr>
-              <a:t>. スプレッドシートは写しで、止めるときはミラーの部品を外す</a:t>
+              <a:t>。スプレッドシートは写しで、ミラーを外せば止められる</a:t>
             </a:r>
           </a:p>
           <a:p>
@@ -26464,7 +26464,7 @@
                 <a:cs typeface="Meiryo"/>
                 <a:ea typeface="Meiryo"/>
               </a:rPr>
-              <a:t>Google系の外部連携は既存のGASブリッジ1本に集約した(新規の課金・認証情報の準備を避けるため)</a:t>
+              <a:t>Google系の連携は既存のGASブリッジ1本に集約(課金・認証情報の新設を避けるため)</a:t>
             </a:r>
           </a:p>
         </p:txBody>
@@ -26478,7 +26478,7 @@
         <p:spPr>
           <a:xfrm>
             <a:off x="6245352" y="4434840"/>
-            <a:ext cx="5486400" cy="1234440"/>
+            <a:ext cx="5486400" cy="1371600"/>
           </a:xfrm>
           <a:prstGeom prst="roundRect">
             <a:avLst>
@@ -26524,7 +26524,7 @@
         <p:spPr>
           <a:xfrm>
             <a:off x="6245352" y="4434840"/>
-            <a:ext cx="68580" cy="1234440"/>
+            <a:ext cx="68580" cy="1371600"/>
           </a:xfrm>
           <a:prstGeom prst="rect">
             <a:avLst/>
@@ -26610,7 +26610,7 @@
         <p:spPr>
           <a:xfrm>
             <a:off x="6428232" y="4782312"/>
-            <a:ext cx="5138928" cy="813816"/>
+            <a:ext cx="5138928" cy="950976"/>
           </a:xfrm>
           <a:prstGeom prst="rect">
             <a:avLst/>
@@ -26651,8 +26651,8 @@
         </p:nvSpPr>
         <p:spPr>
           <a:xfrm>
-            <a:off x="457200" y="5806440"/>
-            <a:ext cx="11277295" cy="457200"/>
+            <a:off x="457200" y="5897880"/>
+            <a:ext cx="11277295" cy="438912"/>
           </a:xfrm>
           <a:prstGeom prst="roundRect">
             <a:avLst>
@@ -26697,7 +26697,7 @@
         </p:nvSpPr>
         <p:spPr>
           <a:xfrm>
-            <a:off x="640080" y="5888736"/>
+            <a:off x="640080" y="5971032"/>
             <a:ext cx="10911535" cy="274320"/>
           </a:xfrm>
           <a:prstGeom prst="rect">
@@ -26976,7 +26976,7 @@
         </p:nvGraphicFramePr>
         <p:xfrm>
           <a:off x="457200" y="1170432"/>
-          <a:ext cx="11277293" cy="4727448"/>
+          <a:ext cx="11277293" cy="4626864"/>
         </p:xfrm>
         <a:graphic>
           <a:graphicData uri="http://schemas.openxmlformats.org/drawingml/2006/table">
@@ -27112,7 +27112,7 @@
                   </a:tcPr>
                 </a:tc>
               </a:tr>
-              <a:tr h="402336">
+              <a:tr h="393192">
                 <a:tc>
                   <a:txBody>
                     <a:bodyPr wrap="square"/>
@@ -27234,7 +27234,7 @@
                   </a:tcPr>
                 </a:tc>
               </a:tr>
-              <a:tr h="402336">
+              <a:tr h="393192">
                 <a:tc>
                   <a:txBody>
                     <a:bodyPr wrap="square"/>
@@ -27356,7 +27356,7 @@
                   </a:tcPr>
                 </a:tc>
               </a:tr>
-              <a:tr h="402336">
+              <a:tr h="393192">
                 <a:tc>
                   <a:txBody>
                     <a:bodyPr wrap="square"/>
@@ -27478,7 +27478,7 @@
                   </a:tcPr>
                 </a:tc>
               </a:tr>
-              <a:tr h="402336">
+              <a:tr h="393192">
                 <a:tc>
                   <a:txBody>
                     <a:bodyPr wrap="square"/>
@@ -27600,7 +27600,7 @@
                   </a:tcPr>
                 </a:tc>
               </a:tr>
-              <a:tr h="402336">
+              <a:tr h="393192">
                 <a:tc>
                   <a:txBody>
                     <a:bodyPr wrap="square"/>
@@ -27722,7 +27722,7 @@
                   </a:tcPr>
                 </a:tc>
               </a:tr>
-              <a:tr h="402336">
+              <a:tr h="393192">
                 <a:tc>
                   <a:txBody>
                     <a:bodyPr wrap="square"/>
@@ -27844,7 +27844,7 @@
                   </a:tcPr>
                 </a:tc>
               </a:tr>
-              <a:tr h="402336">
+              <a:tr h="393192">
                 <a:tc>
                   <a:txBody>
                     <a:bodyPr wrap="square"/>
@@ -27966,7 +27966,7 @@
                   </a:tcPr>
                 </a:tc>
               </a:tr>
-              <a:tr h="402336">
+              <a:tr h="393192">
                 <a:tc>
                   <a:txBody>
                     <a:bodyPr wrap="square"/>
@@ -28088,7 +28088,7 @@
                   </a:tcPr>
                 </a:tc>
               </a:tr>
-              <a:tr h="402336">
+              <a:tr h="393192">
                 <a:tc>
                   <a:txBody>
                     <a:bodyPr wrap="square"/>
@@ -28210,7 +28210,7 @@
                   </a:tcPr>
                 </a:tc>
               </a:tr>
-              <a:tr h="402336">
+              <a:tr h="393192">
                 <a:tc>
                   <a:txBody>
                     <a:bodyPr wrap="square"/>
@@ -28332,7 +28332,7 @@
                   </a:tcPr>
                 </a:tc>
               </a:tr>
-              <a:tr h="402336">
+              <a:tr h="393192">
                 <a:tc>
                   <a:txBody>
                     <a:bodyPr wrap="square"/>
@@ -28466,8 +28466,8 @@
         </p:nvSpPr>
         <p:spPr>
           <a:xfrm>
-            <a:off x="457200" y="5764911"/>
-            <a:ext cx="11277295" cy="617601"/>
+            <a:off x="457200" y="5925312"/>
+            <a:ext cx="11277295" cy="402336"/>
           </a:xfrm>
           <a:prstGeom prst="roundRect">
             <a:avLst>
@@ -28512,8 +28512,8 @@
         </p:nvSpPr>
         <p:spPr>
           <a:xfrm>
-            <a:off x="457200" y="5764911"/>
-            <a:ext cx="68580" cy="617601"/>
+            <a:off x="457200" y="5925312"/>
+            <a:ext cx="68580" cy="402336"/>
           </a:xfrm>
           <a:prstGeom prst="rect">
             <a:avLst/>
@@ -28556,8 +28556,8 @@
         </p:nvSpPr>
         <p:spPr>
           <a:xfrm>
-            <a:off x="640080" y="5856351"/>
-            <a:ext cx="10911535" cy="237744"/>
+            <a:off x="640080" y="6035040"/>
+            <a:ext cx="10929823" cy="-18288"/>
           </a:xfrm>
           <a:prstGeom prst="rect">
             <a:avLst/>
@@ -28572,48 +28572,6 @@
           <a:p>
             <a:pPr algn="l">
               <a:lnSpc>
-                <a:spcPct val="125000"/>
-              </a:lnSpc>
-              <a:buNone/>
-            </a:pPr>
-            <a:r>
-              <a:rPr sz="1050" b="1" i="0">
-                <a:solidFill>
-                  <a:srgbClr val="B45309"/>
-                </a:solidFill>
-                <a:latin typeface="Meiryo"/>
-                <a:cs typeface="Meiryo"/>
-                <a:ea typeface="Meiryo"/>
-              </a:rPr>
-              <a:t>備考欄について</a:t>
-            </a:r>
-          </a:p>
-        </p:txBody>
-      </p:sp>
-      <p:sp>
-        <p:nvSpPr>
-          <p:cNvPr id="11" name="TextBox 10"/>
-          <p:cNvSpPr txBox="1"/>
-          <p:nvPr/>
-        </p:nvSpPr>
-        <p:spPr>
-          <a:xfrm>
-            <a:off x="640080" y="6112383"/>
-            <a:ext cx="10929823" cy="196976"/>
-          </a:xfrm>
-          <a:prstGeom prst="rect">
-            <a:avLst/>
-          </a:prstGeom>
-          <a:noFill/>
-        </p:spPr>
-        <p:txBody>
-          <a:bodyPr wrap="square" lIns="0" rIns="0" tIns="0" bIns="0" anchor="t">
-            <a:spAutoFit/>
-          </a:bodyPr>
-          <a:lstStyle/>
-          <a:p>
-            <a:pPr algn="l">
-              <a:lnSpc>
                 <a:spcPct val="133000"/>
               </a:lnSpc>
               <a:buNone/>
@@ -28627,7 +28585,7 @@
                 <a:cs typeface="Meiryo"/>
                 <a:ea typeface="Meiryo"/>
               </a:rPr>
-              <a:t>提案書に書いた方針から変更した箇所と、未配備のものだけを記載しています。変更の理由は各章で説明します。</a:t>
+              <a:t>備考欄には、提案書の方針から変更した箇所と未配備のものだけを記載しています。変更の理由は各章で説明します。</a:t>
             </a:r>
           </a:p>
         </p:txBody>
